--- a/AABA-Poster/GM-AABA2026Poster-FinalDraft5.pptx
+++ b/AABA-Poster/GM-AABA2026Poster-FinalDraft5.pptx
@@ -249,7 +249,7 @@
           <a:p>
             <a:fld id="{0E19EFA1-6199-496A-BC1D-DE705E3EBA0B}" type="datetimeFigureOut">
               <a:rPr lang="en-US" smtClean="0"/>
-              <a:t>3/15/2026</a:t>
+              <a:t>3/16/2026</a:t>
             </a:fld>
             <a:endParaRPr lang="en-US"/>
           </a:p>
@@ -419,7 +419,7 @@
           <a:p>
             <a:fld id="{0E19EFA1-6199-496A-BC1D-DE705E3EBA0B}" type="datetimeFigureOut">
               <a:rPr lang="en-US" smtClean="0"/>
-              <a:t>3/15/2026</a:t>
+              <a:t>3/16/2026</a:t>
             </a:fld>
             <a:endParaRPr lang="en-US"/>
           </a:p>
@@ -599,7 +599,7 @@
           <a:p>
             <a:fld id="{0E19EFA1-6199-496A-BC1D-DE705E3EBA0B}" type="datetimeFigureOut">
               <a:rPr lang="en-US" smtClean="0"/>
-              <a:t>3/15/2026</a:t>
+              <a:t>3/16/2026</a:t>
             </a:fld>
             <a:endParaRPr lang="en-US"/>
           </a:p>
@@ -769,7 +769,7 @@
           <a:p>
             <a:fld id="{0E19EFA1-6199-496A-BC1D-DE705E3EBA0B}" type="datetimeFigureOut">
               <a:rPr lang="en-US" smtClean="0"/>
-              <a:t>3/15/2026</a:t>
+              <a:t>3/16/2026</a:t>
             </a:fld>
             <a:endParaRPr lang="en-US"/>
           </a:p>
@@ -1015,7 +1015,7 @@
           <a:p>
             <a:fld id="{0E19EFA1-6199-496A-BC1D-DE705E3EBA0B}" type="datetimeFigureOut">
               <a:rPr lang="en-US" smtClean="0"/>
-              <a:t>3/15/2026</a:t>
+              <a:t>3/16/2026</a:t>
             </a:fld>
             <a:endParaRPr lang="en-US"/>
           </a:p>
@@ -1247,7 +1247,7 @@
           <a:p>
             <a:fld id="{0E19EFA1-6199-496A-BC1D-DE705E3EBA0B}" type="datetimeFigureOut">
               <a:rPr lang="en-US" smtClean="0"/>
-              <a:t>3/15/2026</a:t>
+              <a:t>3/16/2026</a:t>
             </a:fld>
             <a:endParaRPr lang="en-US"/>
           </a:p>
@@ -1614,7 +1614,7 @@
           <a:p>
             <a:fld id="{0E19EFA1-6199-496A-BC1D-DE705E3EBA0B}" type="datetimeFigureOut">
               <a:rPr lang="en-US" smtClean="0"/>
-              <a:t>3/15/2026</a:t>
+              <a:t>3/16/2026</a:t>
             </a:fld>
             <a:endParaRPr lang="en-US"/>
           </a:p>
@@ -1732,7 +1732,7 @@
           <a:p>
             <a:fld id="{0E19EFA1-6199-496A-BC1D-DE705E3EBA0B}" type="datetimeFigureOut">
               <a:rPr lang="en-US" smtClean="0"/>
-              <a:t>3/15/2026</a:t>
+              <a:t>3/16/2026</a:t>
             </a:fld>
             <a:endParaRPr lang="en-US"/>
           </a:p>
@@ -1827,7 +1827,7 @@
           <a:p>
             <a:fld id="{0E19EFA1-6199-496A-BC1D-DE705E3EBA0B}" type="datetimeFigureOut">
               <a:rPr lang="en-US" smtClean="0"/>
-              <a:t>3/15/2026</a:t>
+              <a:t>3/16/2026</a:t>
             </a:fld>
             <a:endParaRPr lang="en-US"/>
           </a:p>
@@ -2104,7 +2104,7 @@
           <a:p>
             <a:fld id="{0E19EFA1-6199-496A-BC1D-DE705E3EBA0B}" type="datetimeFigureOut">
               <a:rPr lang="en-US" smtClean="0"/>
-              <a:t>3/15/2026</a:t>
+              <a:t>3/16/2026</a:t>
             </a:fld>
             <a:endParaRPr lang="en-US"/>
           </a:p>
@@ -2361,7 +2361,7 @@
           <a:p>
             <a:fld id="{0E19EFA1-6199-496A-BC1D-DE705E3EBA0B}" type="datetimeFigureOut">
               <a:rPr lang="en-US" smtClean="0"/>
-              <a:t>3/15/2026</a:t>
+              <a:t>3/16/2026</a:t>
             </a:fld>
             <a:endParaRPr lang="en-US"/>
           </a:p>
@@ -2574,7 +2574,7 @@
           <a:p>
             <a:fld id="{0E19EFA1-6199-496A-BC1D-DE705E3EBA0B}" type="datetimeFigureOut">
               <a:rPr lang="en-US" smtClean="0"/>
-              <a:t>3/15/2026</a:t>
+              <a:t>3/16/2026</a:t>
             </a:fld>
             <a:endParaRPr lang="en-US"/>
           </a:p>
@@ -2968,10 +2968,9 @@
     <p:bg>
       <p:bgPr>
         <a:solidFill>
-          <a:schemeClr val="accent3">
-            <a:lumMod val="20000"/>
-            <a:lumOff val="80000"/>
-          </a:schemeClr>
+          <a:srgbClr val="8B79EE">
+            <a:alpha val="34000"/>
+          </a:srgbClr>
         </a:solidFill>
         <a:effectLst/>
       </p:bgPr>
@@ -3011,7 +3010,7 @@
             <a:avLst/>
           </a:prstGeom>
           <a:solidFill>
-            <a:srgbClr val="A4DEEE"/>
+            <a:srgbClr val="E2E78F"/>
           </a:solidFill>
           <a:ln w="38100">
             <a:solidFill>
@@ -3062,7 +3061,7 @@
         <p:spPr>
           <a:xfrm>
             <a:off x="299864" y="5466463"/>
-            <a:ext cx="3931920" cy="24468237"/>
+            <a:ext cx="3931920" cy="24745236"/>
           </a:xfrm>
           <a:custGeom>
             <a:avLst/>
@@ -3304,15 +3303,15 @@
                 <a:latin typeface="Arial" panose="020B0604020202020204" pitchFamily="34" charset="0"/>
                 <a:cs typeface="Arial" panose="020B0604020202020204" pitchFamily="34" charset="0"/>
               </a:rPr>
-              <a:t>Borries, C., Gordon, A. D., &amp; Koenig, A. (2013). Beware of Primate Life History Data: A Plea for Data Standards and a Repository. PLOS ONE, 8(6), e67200. </a:t>
-            </a:r>
-            <a:r>
-              <a:rPr lang="en-US" u="sng" dirty="0">
+              <a:t>Harvey, P. H., &amp; Clutton-Brock, T. H. (1985). Life History Variation in Primates. Evolution, 39(3), 559–581. </a:t>
+            </a:r>
+            <a:r>
+              <a:rPr lang="en-US" dirty="0">
                 <a:latin typeface="Arial" panose="020B0604020202020204" pitchFamily="34" charset="0"/>
                 <a:cs typeface="Arial" panose="020B0604020202020204" pitchFamily="34" charset="0"/>
                 <a:hlinkClick r:id="rId2"/>
               </a:rPr>
-              <a:t>https://doi.org/10.1371/journal.pone.0067200</a:t>
+              <a:t>https://doi.org/10.1111/j.1558-5646.1985.tb00395.x</a:t>
             </a:r>
             <a:endParaRPr lang="en-US" dirty="0">
               <a:latin typeface="Arial" panose="020B0604020202020204" pitchFamily="34" charset="0"/>
@@ -3329,15 +3328,15 @@
                 <a:latin typeface="Arial" panose="020B0604020202020204" pitchFamily="34" charset="0"/>
                 <a:cs typeface="Arial" panose="020B0604020202020204" pitchFamily="34" charset="0"/>
               </a:rPr>
-              <a:t>Ernest, S.K.M. (2003), LIFE HISTORY CHARACTERISTICS OF PLACENTAL NONVOLANT MAMMALS. Ecology, 84: 3402-3402. </a:t>
-            </a:r>
-            <a:r>
-              <a:rPr lang="en-US" u="sng" dirty="0">
+              <a:t>Stearns, S. C. (1989). Trade-Offs in Life-History Evolution. Functional Ecology, 3(3), 259. </a:t>
+            </a:r>
+            <a:r>
+              <a:rPr lang="en-US" dirty="0">
                 <a:latin typeface="Arial" panose="020B0604020202020204" pitchFamily="34" charset="0"/>
                 <a:cs typeface="Arial" panose="020B0604020202020204" pitchFamily="34" charset="0"/>
                 <a:hlinkClick r:id="rId3"/>
               </a:rPr>
-              <a:t>https://doi.org/10.1890/02-9002</a:t>
+              <a:t>https://doi.org/10.2307/2389364</a:t>
             </a:r>
             <a:endParaRPr lang="en-US" dirty="0">
               <a:latin typeface="Arial" panose="020B0604020202020204" pitchFamily="34" charset="0"/>
@@ -3354,8 +3353,48 @@
                 <a:latin typeface="Arial" panose="020B0604020202020204" pitchFamily="34" charset="0"/>
                 <a:cs typeface="Arial" panose="020B0604020202020204" pitchFamily="34" charset="0"/>
               </a:rPr>
-              <a:t>de Magalhães JP, Costa J. A database of vertebrate longevity records and their relation to other life-history traits. J Evol Biol. 2009 Aug;22(8):1770-4. </a:t>
-            </a:r>
+              <a:t>Stott, I., Salguero-Gómez, R., Jones, O. R., et al. (2024). Life histories are not just fast or slow. </a:t>
+            </a:r>
+            <a:r>
+              <a:rPr lang="en-US" i="1" dirty="0">
+                <a:latin typeface="Arial" panose="020B0604020202020204" pitchFamily="34" charset="0"/>
+                <a:cs typeface="Arial" panose="020B0604020202020204" pitchFamily="34" charset="0"/>
+              </a:rPr>
+              <a:t>Trends in Ecology &amp; Evolution</a:t>
+            </a:r>
+            <a:r>
+              <a:rPr lang="en-US" dirty="0">
+                <a:latin typeface="Arial" panose="020B0604020202020204" pitchFamily="34" charset="0"/>
+                <a:cs typeface="Arial" panose="020B0604020202020204" pitchFamily="34" charset="0"/>
+              </a:rPr>
+              <a:t>, </a:t>
+            </a:r>
+            <a:r>
+              <a:rPr lang="en-US" i="1" dirty="0">
+                <a:latin typeface="Arial" panose="020B0604020202020204" pitchFamily="34" charset="0"/>
+                <a:cs typeface="Arial" panose="020B0604020202020204" pitchFamily="34" charset="0"/>
+              </a:rPr>
+              <a:t>39</a:t>
+            </a:r>
+            <a:r>
+              <a:rPr lang="en-US" dirty="0">
+                <a:latin typeface="Arial" panose="020B0604020202020204" pitchFamily="34" charset="0"/>
+                <a:cs typeface="Arial" panose="020B0604020202020204" pitchFamily="34" charset="0"/>
+              </a:rPr>
+              <a:t>(9), 830–840. </a:t>
+            </a:r>
+            <a:r>
+              <a:rPr lang="en-US" dirty="0">
+                <a:latin typeface="Arial" panose="020B0604020202020204" pitchFamily="34" charset="0"/>
+                <a:cs typeface="Arial" panose="020B0604020202020204" pitchFamily="34" charset="0"/>
+                <a:hlinkClick r:id="rId4"/>
+              </a:rPr>
+              <a:t>https://doi.org/10.1016/j.tree.2024.06.001</a:t>
+            </a:r>
+            <a:endParaRPr lang="en-US" dirty="0">
+              <a:latin typeface="Arial" panose="020B0604020202020204" pitchFamily="34" charset="0"/>
+              <a:cs typeface="Arial" panose="020B0604020202020204" pitchFamily="34" charset="0"/>
+            </a:endParaRPr>
           </a:p>
           <a:p>
             <a:pPr marL="460375" indent="-460375">
@@ -3363,12 +3402,31 @@
               <a:buAutoNum type="arabicPeriod"/>
             </a:pPr>
             <a:r>
+              <a:rPr lang="en-US" dirty="0" err="1">
+                <a:latin typeface="Arial" panose="020B0604020202020204" pitchFamily="34" charset="0"/>
+                <a:cs typeface="Arial" panose="020B0604020202020204" pitchFamily="34" charset="0"/>
+              </a:rPr>
+              <a:t>Strier</a:t>
+            </a:r>
+            <a:r>
               <a:rPr lang="en-US" dirty="0">
                 <a:latin typeface="Arial" panose="020B0604020202020204" pitchFamily="34" charset="0"/>
                 <a:cs typeface="Arial" panose="020B0604020202020204" pitchFamily="34" charset="0"/>
               </a:rPr>
-              <a:t>de Magalhães, J. P., Abidi, Z., Dos Santos, G. A., et al. (2024) "Human Ageing Genomic Resources: updates on key databases in ageing research." Nucleic Acids Research 52(D1):D900-D908.</a:t>
-            </a:r>
+              <a:t> KB, Altmann J, Brockman DK, et al. (2010) The Primate Life History Database: A unique shared ecological data resource. Methods Ecol Evol., 1(2):199-211. </a:t>
+            </a:r>
+            <a:r>
+              <a:rPr lang="en-US" dirty="0">
+                <a:latin typeface="Arial" panose="020B0604020202020204" pitchFamily="34" charset="0"/>
+                <a:cs typeface="Arial" panose="020B0604020202020204" pitchFamily="34" charset="0"/>
+                <a:hlinkClick r:id="rId5"/>
+              </a:rPr>
+              <a:t>https://doi.org/10.1111/j.2041-210x.2010.00023.x</a:t>
+            </a:r>
+            <a:endParaRPr lang="en-US" dirty="0">
+              <a:latin typeface="Arial" panose="020B0604020202020204" pitchFamily="34" charset="0"/>
+              <a:cs typeface="Arial" panose="020B0604020202020204" pitchFamily="34" charset="0"/>
+            </a:endParaRPr>
           </a:p>
           <a:p>
             <a:pPr marL="460375" indent="-460375">
@@ -3380,15 +3438,15 @@
                 <a:latin typeface="Arial" panose="020B0604020202020204" pitchFamily="34" charset="0"/>
                 <a:cs typeface="Arial" panose="020B0604020202020204" pitchFamily="34" charset="0"/>
               </a:rPr>
-              <a:t>Harvey, P. H., &amp; Clutton-Brock, T. H. (1985). Life History Variation in Primates. Evolution, 39(3), 559–581. </a:t>
-            </a:r>
-            <a:r>
-              <a:rPr lang="en-US" dirty="0">
-                <a:latin typeface="Arial" panose="020B0604020202020204" pitchFamily="34" charset="0"/>
-                <a:cs typeface="Arial" panose="020B0604020202020204" pitchFamily="34" charset="0"/>
-                <a:hlinkClick r:id="rId4"/>
-              </a:rPr>
-              <a:t>https://doi.org/10.1111/j.1558-5646.1985.tb00395.x</a:t>
+              <a:t>Borries, C., Gordon, A. D., &amp; Koenig, A. (2013). Beware of Primate Life History Data: A Plea for Data Standards and a Repository. PLOS ONE, 8(6), e67200. </a:t>
+            </a:r>
+            <a:r>
+              <a:rPr lang="en-US" u="sng" dirty="0">
+                <a:latin typeface="Arial" panose="020B0604020202020204" pitchFamily="34" charset="0"/>
+                <a:cs typeface="Arial" panose="020B0604020202020204" pitchFamily="34" charset="0"/>
+                <a:hlinkClick r:id="rId6"/>
+              </a:rPr>
+              <a:t>https://doi.org/10.1371/journal.pone.0067200</a:t>
             </a:r>
             <a:endParaRPr lang="en-US" dirty="0">
               <a:latin typeface="Arial" panose="020B0604020202020204" pitchFamily="34" charset="0"/>
@@ -3405,8 +3463,20 @@
                 <a:latin typeface="Arial" panose="020B0604020202020204" pitchFamily="34" charset="0"/>
                 <a:cs typeface="Arial" panose="020B0604020202020204" pitchFamily="34" charset="0"/>
               </a:rPr>
-              <a:t>Mittermeier, R. (2025). 2024-2025 Report of the Primate Specialist Group. In: IUCN SSC and Secretariat. Species: Annual Report of the IUCN Species Survival Commission and Secretariat 2024-2025. Gland, Switzerland: IUCN. 12 pp.</a:t>
-            </a:r>
+              <a:t>Ernest, S.K.M. (2003), LIFE HISTORY CHARACTERISTICS OF PLACENTAL NONVOLANT MAMMALS. Ecology, 84: 3402-3402. </a:t>
+            </a:r>
+            <a:r>
+              <a:rPr lang="en-US" u="sng" dirty="0">
+                <a:latin typeface="Arial" panose="020B0604020202020204" pitchFamily="34" charset="0"/>
+                <a:cs typeface="Arial" panose="020B0604020202020204" pitchFamily="34" charset="0"/>
+                <a:hlinkClick r:id="rId7"/>
+              </a:rPr>
+              <a:t>https://doi.org/10.1890/02-9002</a:t>
+            </a:r>
+            <a:endParaRPr lang="en-US" dirty="0">
+              <a:latin typeface="Arial" panose="020B0604020202020204" pitchFamily="34" charset="0"/>
+              <a:cs typeface="Arial" panose="020B0604020202020204" pitchFamily="34" charset="0"/>
+            </a:endParaRPr>
           </a:p>
           <a:p>
             <a:pPr marL="460375" indent="-460375">
@@ -3418,13 +3488,39 @@
                 <a:latin typeface="Arial" panose="020B0604020202020204" pitchFamily="34" charset="0"/>
                 <a:cs typeface="Arial" panose="020B0604020202020204" pitchFamily="34" charset="0"/>
               </a:rPr>
+              <a:t>de Magalhães JP, Costa J. A database of vertebrate longevity records and their relation to other life-history traits. J Evol Biol. 2009 Aug;22(8):1770-4. </a:t>
+            </a:r>
+          </a:p>
+          <a:p>
+            <a:pPr marL="460375" indent="-460375">
+              <a:buFont typeface="+mj-lt"/>
+              <a:buAutoNum type="arabicPeriod"/>
+            </a:pPr>
+            <a:r>
+              <a:rPr lang="en-US" dirty="0">
+                <a:latin typeface="Arial" panose="020B0604020202020204" pitchFamily="34" charset="0"/>
+                <a:cs typeface="Arial" panose="020B0604020202020204" pitchFamily="34" charset="0"/>
+              </a:rPr>
+              <a:t>de Magalhães, J. P., Abidi, Z., Dos Santos, G. A., et al. (2024) "Human Ageing Genomic Resources: updates on key databases in ageing research." Nucleic Acids Research 52(D1):D900-D908.</a:t>
+            </a:r>
+          </a:p>
+          <a:p>
+            <a:pPr marL="460375" indent="-460375">
+              <a:buFont typeface="+mj-lt"/>
+              <a:buAutoNum type="arabicPeriod"/>
+            </a:pPr>
+            <a:r>
+              <a:rPr lang="en-US" dirty="0">
+                <a:latin typeface="Arial" panose="020B0604020202020204" pitchFamily="34" charset="0"/>
+                <a:cs typeface="Arial" panose="020B0604020202020204" pitchFamily="34" charset="0"/>
+              </a:rPr>
               <a:t>Jones, K. E., Bielby, J., Cardillo, M., et al. (2009). PanTHERIA: A species-level database of life history, ecology, and geography of extant and recently extinct mammals. Ecology, 90(9), 2648–2648. </a:t>
             </a:r>
             <a:r>
               <a:rPr lang="en-US" u="sng" dirty="0">
                 <a:latin typeface="Arial" panose="020B0604020202020204" pitchFamily="34" charset="0"/>
                 <a:cs typeface="Arial" panose="020B0604020202020204" pitchFamily="34" charset="0"/>
-                <a:hlinkClick r:id="rId5"/>
+                <a:hlinkClick r:id="rId8"/>
               </a:rPr>
               <a:t>https://doi.org/10.1890/08-1494.1</a:t>
             </a:r>
@@ -3476,7 +3572,7 @@
               <a:rPr lang="en-US" dirty="0">
                 <a:latin typeface="Arial" panose="020B0604020202020204" pitchFamily="34" charset="0"/>
                 <a:cs typeface="Arial" panose="020B0604020202020204" pitchFamily="34" charset="0"/>
-                <a:hlinkClick r:id="rId6"/>
+                <a:hlinkClick r:id="rId9"/>
               </a:rPr>
               <a:t>https://doi.org/10.1890/15-0846R.1</a:t>
             </a:r>
@@ -3495,105 +3591,8 @@
                 <a:latin typeface="Arial" panose="020B0604020202020204" pitchFamily="34" charset="0"/>
                 <a:cs typeface="Arial" panose="020B0604020202020204" pitchFamily="34" charset="0"/>
               </a:rPr>
-              <a:t>Stearns, S. C. (1989). Trade-Offs in Life-History Evolution. Functional Ecology, 3(3), 259. </a:t>
-            </a:r>
-            <a:r>
-              <a:rPr lang="en-US" dirty="0">
-                <a:latin typeface="Arial" panose="020B0604020202020204" pitchFamily="34" charset="0"/>
-                <a:cs typeface="Arial" panose="020B0604020202020204" pitchFamily="34" charset="0"/>
-                <a:hlinkClick r:id="rId7"/>
-              </a:rPr>
-              <a:t>https://doi.org/10.2307/2389364</a:t>
-            </a:r>
-            <a:endParaRPr lang="en-US" dirty="0">
-              <a:latin typeface="Arial" panose="020B0604020202020204" pitchFamily="34" charset="0"/>
-              <a:cs typeface="Arial" panose="020B0604020202020204" pitchFamily="34" charset="0"/>
-            </a:endParaRPr>
-          </a:p>
-          <a:p>
-            <a:pPr marL="460375" indent="-460375">
-              <a:buFont typeface="+mj-lt"/>
-              <a:buAutoNum type="arabicPeriod"/>
-            </a:pPr>
-            <a:r>
-              <a:rPr lang="en-US" dirty="0">
-                <a:latin typeface="Arial" panose="020B0604020202020204" pitchFamily="34" charset="0"/>
-                <a:cs typeface="Arial" panose="020B0604020202020204" pitchFamily="34" charset="0"/>
-              </a:rPr>
-              <a:t>Stott, I., Salguero-Gómez, R., Jones, O. R., et al. (2024). Life histories are not just fast or slow. </a:t>
-            </a:r>
-            <a:r>
-              <a:rPr lang="en-US" i="1" dirty="0">
-                <a:latin typeface="Arial" panose="020B0604020202020204" pitchFamily="34" charset="0"/>
-                <a:cs typeface="Arial" panose="020B0604020202020204" pitchFamily="34" charset="0"/>
-              </a:rPr>
-              <a:t>Trends in Ecology &amp; Evolution</a:t>
-            </a:r>
-            <a:r>
-              <a:rPr lang="en-US" dirty="0">
-                <a:latin typeface="Arial" panose="020B0604020202020204" pitchFamily="34" charset="0"/>
-                <a:cs typeface="Arial" panose="020B0604020202020204" pitchFamily="34" charset="0"/>
-              </a:rPr>
-              <a:t>, </a:t>
-            </a:r>
-            <a:r>
-              <a:rPr lang="en-US" i="1" dirty="0">
-                <a:latin typeface="Arial" panose="020B0604020202020204" pitchFamily="34" charset="0"/>
-                <a:cs typeface="Arial" panose="020B0604020202020204" pitchFamily="34" charset="0"/>
-              </a:rPr>
-              <a:t>39</a:t>
-            </a:r>
-            <a:r>
-              <a:rPr lang="en-US" dirty="0">
-                <a:latin typeface="Arial" panose="020B0604020202020204" pitchFamily="34" charset="0"/>
-                <a:cs typeface="Arial" panose="020B0604020202020204" pitchFamily="34" charset="0"/>
-              </a:rPr>
-              <a:t>(9), 830–840. </a:t>
-            </a:r>
-            <a:r>
-              <a:rPr lang="en-US" dirty="0">
-                <a:latin typeface="Arial" panose="020B0604020202020204" pitchFamily="34" charset="0"/>
-                <a:cs typeface="Arial" panose="020B0604020202020204" pitchFamily="34" charset="0"/>
-                <a:hlinkClick r:id="rId8"/>
-              </a:rPr>
-              <a:t>https://doi.org/10.1016/j.tree.2024.06.001</a:t>
-            </a:r>
-            <a:endParaRPr lang="en-US" dirty="0">
-              <a:latin typeface="Arial" panose="020B0604020202020204" pitchFamily="34" charset="0"/>
-              <a:cs typeface="Arial" panose="020B0604020202020204" pitchFamily="34" charset="0"/>
-            </a:endParaRPr>
-          </a:p>
-          <a:p>
-            <a:pPr marL="460375" indent="-460375">
-              <a:buFont typeface="+mj-lt"/>
-              <a:buAutoNum type="arabicPeriod"/>
-            </a:pPr>
-            <a:r>
-              <a:rPr lang="en-US" dirty="0" err="1">
-                <a:latin typeface="Arial" panose="020B0604020202020204" pitchFamily="34" charset="0"/>
-                <a:cs typeface="Arial" panose="020B0604020202020204" pitchFamily="34" charset="0"/>
-              </a:rPr>
-              <a:t>Strier</a:t>
-            </a:r>
-            <a:r>
-              <a:rPr lang="en-US" dirty="0">
-                <a:latin typeface="Arial" panose="020B0604020202020204" pitchFamily="34" charset="0"/>
-                <a:cs typeface="Arial" panose="020B0604020202020204" pitchFamily="34" charset="0"/>
-              </a:rPr>
-              <a:t> KB, Altmann J, Brockman DK, et al. (2010) The Primate Life History Database: A unique shared ecological data resource. Methods Ecol Evol., 1(2):199-211. </a:t>
-            </a:r>
-            <a:r>
-              <a:rPr lang="en-US" dirty="0">
-                <a:latin typeface="Arial" panose="020B0604020202020204" pitchFamily="34" charset="0"/>
-                <a:cs typeface="Arial" panose="020B0604020202020204" pitchFamily="34" charset="0"/>
-                <a:hlinkClick r:id="rId9"/>
-              </a:rPr>
-              <a:t>https://doi.org/10.1111/j.2041-210x.2010.00023.x</a:t>
-            </a:r>
-            <a:endParaRPr lang="en-US" dirty="0">
-              <a:latin typeface="Arial" panose="020B0604020202020204" pitchFamily="34" charset="0"/>
-              <a:cs typeface="Arial" panose="020B0604020202020204" pitchFamily="34" charset="0"/>
-            </a:endParaRPr>
+              <a:t>Mittermeier, R. (2025). 2024-2025 Report of the Primate Specialist Group. In: IUCN SSC and Secretariat. Species: Annual Report of the IUCN Species Survival Commission and Secretariat 2024-2025. Gland, Switzerland: IUCN. 12 pp.</a:t>
+            </a:r>
           </a:p>
         </p:txBody>
       </p:sp>
@@ -3611,7 +3610,7 @@
         </p:nvSpPr>
         <p:spPr>
           <a:xfrm>
-            <a:off x="4892224" y="743804"/>
+            <a:off x="4937613" y="490764"/>
             <a:ext cx="32855890" cy="4292650"/>
           </a:xfrm>
           <a:prstGeom prst="rect">
@@ -3776,8 +3775,8 @@
         </p:nvSpPr>
         <p:spPr>
           <a:xfrm>
-            <a:off x="28991530" y="5466463"/>
-            <a:ext cx="9022919" cy="20848320"/>
+            <a:off x="4776819" y="26777302"/>
+            <a:ext cx="8686800" cy="11296362"/>
           </a:xfrm>
           <a:custGeom>
             <a:avLst/>
@@ -3974,7 +3973,7 @@
           <a:p>
             <a:pPr algn="ctr">
               <a:lnSpc>
-                <a:spcPct val="150000"/>
+                <a:spcPct val="175000"/>
               </a:lnSpc>
             </a:pPr>
             <a:r>
@@ -3988,7 +3987,7 @@
           <a:p>
             <a:pPr marL="457200" indent="-457200">
               <a:lnSpc>
-                <a:spcPct val="150000"/>
+                <a:spcPct val="175000"/>
               </a:lnSpc>
               <a:buFont typeface="Wingdings" panose="05000000000000000000" pitchFamily="2" charset="2"/>
               <a:buChar char="v"/>
@@ -3998,13 +3997,13 @@
                 <a:latin typeface="Arial" panose="020B0604020202020204" pitchFamily="34" charset="0"/>
                 <a:cs typeface="Arial" panose="020B0604020202020204" pitchFamily="34" charset="0"/>
               </a:rPr>
-              <a:t>We selected datasets based on those used in [1] and through literature review, choosing [3,4] and [9] because they contain a large range of primary data.</a:t>
+              <a:t>We identified and selected all datasets that included wide life history trait coverage for primates [5].</a:t>
             </a:r>
           </a:p>
           <a:p>
             <a:pPr marL="457200" indent="-457200">
               <a:lnSpc>
-                <a:spcPct val="150000"/>
+                <a:spcPct val="175000"/>
               </a:lnSpc>
               <a:buFont typeface="Wingdings" panose="05000000000000000000" pitchFamily="2" charset="2"/>
               <a:buChar char="v"/>
@@ -4014,13 +4013,13 @@
                 <a:latin typeface="Arial" panose="020B0604020202020204" pitchFamily="34" charset="0"/>
                 <a:cs typeface="Arial" panose="020B0604020202020204" pitchFamily="34" charset="0"/>
               </a:rPr>
-              <a:t>We compared the structures of the datasets and selected seven key LH traits commonly studied in primates and shared across all or most datasets.</a:t>
+              <a:t>We compared the structures of the datasets and selected seven key life history characteristics.</a:t>
             </a:r>
           </a:p>
           <a:p>
             <a:pPr marL="457200" indent="-457200">
               <a:lnSpc>
-                <a:spcPct val="150000"/>
+                <a:spcPct val="175000"/>
               </a:lnSpc>
               <a:buFont typeface="Wingdings" panose="05000000000000000000" pitchFamily="2" charset="2"/>
               <a:buChar char="v"/>
@@ -4030,13 +4029,13 @@
                 <a:latin typeface="Arial" panose="020B0604020202020204" pitchFamily="34" charset="0"/>
                 <a:cs typeface="Arial" panose="020B0604020202020204" pitchFamily="34" charset="0"/>
               </a:rPr>
-              <a:t>We compared these datasets using three metrics: The presence of values, taxonomic representation, and metadata accessibility and content.</a:t>
+              <a:t>We compared these datasets using several metrics: </a:t>
             </a:r>
           </a:p>
           <a:p>
             <a:pPr marL="914400" lvl="1" indent="-457200">
               <a:lnSpc>
-                <a:spcPct val="150000"/>
+                <a:spcPct val="175000"/>
               </a:lnSpc>
               <a:buFont typeface="Wingdings" panose="05000000000000000000" pitchFamily="2" charset="2"/>
               <a:buChar char="v"/>
@@ -4046,13 +4045,13 @@
                 <a:latin typeface="Arial" panose="020B0604020202020204" pitchFamily="34" charset="0"/>
                 <a:cs typeface="Arial" panose="020B0604020202020204" pitchFamily="34" charset="0"/>
               </a:rPr>
-              <a:t>For each database, we quantified the proportion of values equivalent to “NA” for all available key traits for each species.</a:t>
+              <a:t>The presence of values to evaluate missingness</a:t>
             </a:r>
           </a:p>
           <a:p>
             <a:pPr marL="914400" lvl="1" indent="-457200">
               <a:lnSpc>
-                <a:spcPct val="150000"/>
+                <a:spcPct val="175000"/>
               </a:lnSpc>
               <a:buFont typeface="Wingdings" panose="05000000000000000000" pitchFamily="2" charset="2"/>
               <a:buChar char="v"/>
@@ -4062,13 +4061,13 @@
                 <a:latin typeface="Arial" panose="020B0604020202020204" pitchFamily="34" charset="0"/>
                 <a:cs typeface="Arial" panose="020B0604020202020204" pitchFamily="34" charset="0"/>
               </a:rPr>
-              <a:t>We quantified the relative proportions of primate species and compared each database to examine biases in species coverage.</a:t>
+              <a:t>Taxonomic representation to measure bias in species coverage</a:t>
             </a:r>
           </a:p>
           <a:p>
             <a:pPr marL="914400" lvl="1" indent="-457200">
               <a:lnSpc>
-                <a:spcPct val="150000"/>
+                <a:spcPct val="175000"/>
               </a:lnSpc>
               <a:buFont typeface="Wingdings" panose="05000000000000000000" pitchFamily="2" charset="2"/>
               <a:buChar char="v"/>
@@ -4078,55 +4077,7 @@
                 <a:latin typeface="Arial" panose="020B0604020202020204" pitchFamily="34" charset="0"/>
                 <a:cs typeface="Arial" panose="020B0604020202020204" pitchFamily="34" charset="0"/>
               </a:rPr>
-              <a:t>We designed a rubric to objectively score the metadata availability, accessibility, and content of each dataset.</a:t>
-            </a:r>
-          </a:p>
-          <a:p>
-            <a:pPr marL="914400" lvl="1" indent="-457200">
-              <a:lnSpc>
-                <a:spcPct val="150000"/>
-              </a:lnSpc>
-              <a:buFont typeface="Wingdings" panose="05000000000000000000" pitchFamily="2" charset="2"/>
-              <a:buChar char="v"/>
-            </a:pPr>
-            <a:r>
-              <a:rPr lang="en-US" sz="2800" dirty="0">
-                <a:latin typeface="Arial" panose="020B0604020202020204" pitchFamily="34" charset="0"/>
-                <a:cs typeface="Arial" panose="020B0604020202020204" pitchFamily="34" charset="0"/>
-              </a:rPr>
-              <a:t>We categorically scored the proportion of variables described by the authors and evaluated the detail of description based on the presence of variable units, measurement type, and citation.</a:t>
-            </a:r>
-          </a:p>
-          <a:p>
-            <a:pPr marL="457200" indent="-457200">
-              <a:lnSpc>
-                <a:spcPct val="150000"/>
-              </a:lnSpc>
-              <a:buFont typeface="Wingdings" panose="05000000000000000000" pitchFamily="2" charset="2"/>
-              <a:buChar char="v"/>
-            </a:pPr>
-            <a:r>
-              <a:rPr lang="en-US" sz="2800" dirty="0">
-                <a:latin typeface="Arial" panose="020B0604020202020204" pitchFamily="34" charset="0"/>
-                <a:cs typeface="Arial" panose="020B0604020202020204" pitchFamily="34" charset="0"/>
-              </a:rPr>
-              <a:t>We attempted to validate the division of age of sexual maturity (ASM) into sex classes by comparison to the dimorphism rates of adult body mass using Wilcoxon rank sum and signed rank tests with continuity corrections.</a:t>
-            </a:r>
-          </a:p>
-          <a:p>
-            <a:pPr marL="457200" indent="-457200">
-              <a:lnSpc>
-                <a:spcPct val="150000"/>
-              </a:lnSpc>
-              <a:buFont typeface="Wingdings" panose="05000000000000000000" pitchFamily="2" charset="2"/>
-              <a:buChar char="v"/>
-            </a:pPr>
-            <a:r>
-              <a:rPr lang="en-US" sz="2800" dirty="0">
-                <a:latin typeface="Arial" panose="020B0604020202020204" pitchFamily="34" charset="0"/>
-                <a:cs typeface="Arial" panose="020B0604020202020204" pitchFamily="34" charset="0"/>
-              </a:rPr>
-              <a:t>We evaluated the difference between ASM and age at first reproduction (AFR) when a species has data for both.</a:t>
+              <a:t>Metadata accessibility and the detail and consistency of variable descriptions</a:t>
             </a:r>
           </a:p>
         </p:txBody>
@@ -4141,14 +4092,14 @@
             </a:extLst>
           </p:cNvPr>
           <p:cNvSpPr txBox="1">
-            <a:spLocks noChangeAspect="1"/>
+            <a:spLocks/>
           </p:cNvSpPr>
           <p:nvPr/>
         </p:nvSpPr>
         <p:spPr>
           <a:xfrm>
-            <a:off x="4736692" y="5485289"/>
-            <a:ext cx="8488295" cy="12292789"/>
+            <a:off x="4786873" y="5024383"/>
+            <a:ext cx="8686800" cy="13558520"/>
           </a:xfrm>
           <a:prstGeom prst="rect">
             <a:avLst/>
@@ -4170,7 +4121,7 @@
           <a:p>
             <a:pPr algn="ctr">
               <a:lnSpc>
-                <a:spcPct val="150000"/>
+                <a:spcPct val="175000"/>
               </a:lnSpc>
             </a:pPr>
             <a:r>
@@ -4184,7 +4135,7 @@
           <a:p>
             <a:pPr marL="457200" indent="-457200">
               <a:lnSpc>
-                <a:spcPct val="150000"/>
+                <a:spcPct val="175000"/>
               </a:lnSpc>
               <a:buFont typeface="Wingdings" panose="05000000000000000000" pitchFamily="2" charset="2"/>
               <a:buChar char="v"/>
@@ -4194,20 +4145,20 @@
                 <a:latin typeface="Arial" panose="020B0604020202020204" pitchFamily="34" charset="0"/>
                 <a:cs typeface="Arial" panose="020B0604020202020204" pitchFamily="34" charset="0"/>
               </a:rPr>
-              <a:t>Life history (LH) theory </a:t>
+              <a:t>Life history theory </a:t>
             </a:r>
             <a:r>
               <a:rPr lang="en-US" sz="2800" dirty="0">
                 <a:latin typeface="Arial" panose="020B0604020202020204" pitchFamily="34" charset="0"/>
                 <a:cs typeface="Arial" panose="020B0604020202020204" pitchFamily="34" charset="0"/>
               </a:rPr>
-              <a:t>provides us with a lexicon of variables that characterize the timing and durations of growth and reproduction to maximize fitness. [5, 10]</a:t>
+              <a:t>provides us with a lexicon of variables that characterize the timing and durations of growth and reproduction. [1, 2]</a:t>
             </a:r>
           </a:p>
           <a:p>
             <a:pPr marL="457200" indent="-457200">
               <a:lnSpc>
-                <a:spcPct val="150000"/>
+                <a:spcPct val="175000"/>
               </a:lnSpc>
               <a:buFont typeface="Wingdings" panose="05000000000000000000" pitchFamily="2" charset="2"/>
               <a:buChar char="v"/>
@@ -4231,13 +4182,13 @@
                 <a:latin typeface="Arial" panose="020B0604020202020204" pitchFamily="34" charset="0"/>
                 <a:cs typeface="Arial" panose="020B0604020202020204" pitchFamily="34" charset="0"/>
               </a:rPr>
-              <a:t> to observe and infer population-level rates. [5, 11]</a:t>
+              <a:t> to observe and infer species-level rates. [1, 3, 4]</a:t>
             </a:r>
           </a:p>
           <a:p>
             <a:pPr marL="457200" indent="-457200">
               <a:lnSpc>
-                <a:spcPct val="150000"/>
+                <a:spcPct val="175000"/>
               </a:lnSpc>
               <a:buFont typeface="Wingdings" panose="05000000000000000000" pitchFamily="2" charset="2"/>
               <a:buChar char="v"/>
@@ -4247,7 +4198,7 @@
                 <a:latin typeface="Arial" panose="020B0604020202020204" pitchFamily="34" charset="0"/>
                 <a:cs typeface="Arial" panose="020B0604020202020204" pitchFamily="34" charset="0"/>
               </a:rPr>
-              <a:t>Life history strategies are defined by covariation [11], complicating investigations when </a:t>
+              <a:t>Life history strategies [3], complicating investigations when </a:t>
             </a:r>
             <a:r>
               <a:rPr lang="en-US" sz="2800" b="1" dirty="0">
@@ -4267,7 +4218,7 @@
           <a:p>
             <a:pPr marL="457200" indent="-457200">
               <a:lnSpc>
-                <a:spcPct val="150000"/>
+                <a:spcPct val="175000"/>
               </a:lnSpc>
               <a:buFont typeface="Wingdings" panose="05000000000000000000" pitchFamily="2" charset="2"/>
               <a:buChar char="v"/>
@@ -4291,7 +4242,7 @@
                 <a:latin typeface="Arial" panose="020B0604020202020204" pitchFamily="34" charset="0"/>
                 <a:cs typeface="Arial" panose="020B0604020202020204" pitchFamily="34" charset="0"/>
               </a:rPr>
-              <a:t> in collating LH data for inter-species comparisons [1, 5, 11, 12], such as:</a:t>
+              <a:t> in collating LH data for inter-species comparisons [1, 3, 4, 5], such as:</a:t>
             </a:r>
             <a:r>
               <a:rPr lang="en-US" sz="2800" strike="sngStrike" dirty="0">
@@ -4311,7 +4262,7 @@
           <a:p>
             <a:pPr marL="914400" lvl="1" indent="-457200">
               <a:lnSpc>
-                <a:spcPct val="150000"/>
+                <a:spcPct val="175000"/>
               </a:lnSpc>
               <a:buFont typeface="Wingdings" panose="05000000000000000000" pitchFamily="2" charset="2"/>
               <a:buChar char="v"/>
@@ -4321,13 +4272,13 @@
                 <a:latin typeface="Arial" panose="020B0604020202020204" pitchFamily="34" charset="0"/>
                 <a:cs typeface="Arial" panose="020B0604020202020204" pitchFamily="34" charset="0"/>
               </a:rPr>
-              <a:t>Access to a substantial taxonomic range</a:t>
+              <a:t>Discrepancies in data quality &amp; trait inclusion</a:t>
             </a:r>
           </a:p>
           <a:p>
             <a:pPr marL="914400" lvl="1" indent="-457200">
               <a:lnSpc>
-                <a:spcPct val="150000"/>
+                <a:spcPct val="175000"/>
               </a:lnSpc>
               <a:buFont typeface="Wingdings" panose="05000000000000000000" pitchFamily="2" charset="2"/>
               <a:buChar char="v"/>
@@ -4337,13 +4288,13 @@
                 <a:latin typeface="Arial" panose="020B0604020202020204" pitchFamily="34" charset="0"/>
                 <a:cs typeface="Arial" panose="020B0604020202020204" pitchFamily="34" charset="0"/>
               </a:rPr>
-              <a:t>Differences in variable definitions and units </a:t>
+              <a:t>Taxonomic representation</a:t>
             </a:r>
           </a:p>
           <a:p>
             <a:pPr marL="914400" lvl="1" indent="-457200">
               <a:lnSpc>
-                <a:spcPct val="150000"/>
+                <a:spcPct val="175000"/>
               </a:lnSpc>
               <a:buFont typeface="Wingdings" panose="05000000000000000000" pitchFamily="2" charset="2"/>
               <a:buChar char="v"/>
@@ -4353,13 +4304,13 @@
                 <a:latin typeface="Arial" panose="020B0604020202020204" pitchFamily="34" charset="0"/>
                 <a:cs typeface="Arial" panose="020B0604020202020204" pitchFamily="34" charset="0"/>
               </a:rPr>
-              <a:t>Discrepancies in data quality</a:t>
+              <a:t>Differences in variable definitions</a:t>
             </a:r>
           </a:p>
           <a:p>
             <a:pPr marL="914400" lvl="1" indent="-457200">
               <a:lnSpc>
-                <a:spcPct val="150000"/>
+                <a:spcPct val="175000"/>
               </a:lnSpc>
               <a:buFont typeface="Wingdings" panose="05000000000000000000" pitchFamily="2" charset="2"/>
               <a:buChar char="v"/>
@@ -4388,8 +4339,8 @@
         </p:nvSpPr>
         <p:spPr>
           <a:xfrm>
-            <a:off x="4736692" y="18038623"/>
-            <a:ext cx="8488295" cy="6475812"/>
+            <a:off x="4837518" y="18823872"/>
+            <a:ext cx="8626101" cy="7526099"/>
           </a:xfrm>
           <a:prstGeom prst="rect">
             <a:avLst/>
@@ -4411,7 +4362,7 @@
           <a:p>
             <a:pPr algn="ctr">
               <a:lnSpc>
-                <a:spcPct val="150000"/>
+                <a:spcPct val="175000"/>
               </a:lnSpc>
             </a:pPr>
             <a:r>
@@ -4425,7 +4376,7 @@
           <a:p>
             <a:pPr marL="457200" indent="-457200">
               <a:lnSpc>
-                <a:spcPct val="150000"/>
+                <a:spcPct val="175000"/>
               </a:lnSpc>
               <a:buFont typeface="Wingdings" panose="05000000000000000000" pitchFamily="2" charset="2"/>
               <a:buChar char="v"/>
@@ -4435,13 +4386,13 @@
                 <a:latin typeface="Arial" panose="020B0604020202020204" pitchFamily="34" charset="0"/>
                 <a:cs typeface="Arial" panose="020B0604020202020204" pitchFamily="34" charset="0"/>
               </a:rPr>
-              <a:t>To examine the primate LH characteristics of the Ernest [2], AnAge [3, 4], PanTHERIA [7],  Kappeler &amp; Pereira [8], and Amniotes [9] databases.</a:t>
+              <a:t>To examine the primate LH characteristics of the Ernest [6], AnAge [7, 8], PanTHERIA [9],  Kappeler &amp; Pereira [10], and Amniotes [11] databases.</a:t>
             </a:r>
           </a:p>
           <a:p>
             <a:pPr marL="457200" indent="-457200">
               <a:lnSpc>
-                <a:spcPct val="150000"/>
+                <a:spcPct val="175000"/>
               </a:lnSpc>
               <a:buFont typeface="Wingdings" panose="05000000000000000000" pitchFamily="2" charset="2"/>
               <a:buChar char="v"/>
@@ -4451,13 +4402,13 @@
                 <a:latin typeface="Arial" panose="020B0604020202020204" pitchFamily="34" charset="0"/>
                 <a:cs typeface="Arial" panose="020B0604020202020204" pitchFamily="34" charset="0"/>
               </a:rPr>
-              <a:t>To address consistency and usage issues for researchers who want to employ life history data</a:t>
+              <a:t>To address consistency and usage issues for researchers who employ life history data</a:t>
             </a:r>
           </a:p>
           <a:p>
             <a:pPr marL="457200" indent="-457200">
               <a:lnSpc>
-                <a:spcPct val="150000"/>
+                <a:spcPct val="175000"/>
               </a:lnSpc>
               <a:buFont typeface="Wingdings" panose="05000000000000000000" pitchFamily="2" charset="2"/>
               <a:buChar char="v"/>
@@ -4572,15 +4523,19 @@
           <p:nvPr/>
         </p:nvPicPr>
         <p:blipFill>
-          <a:blip r:embed="rId12"/>
-          <a:srcRect t="576" r="632" b="531"/>
-          <a:stretch>
-            <a:fillRect/>
-          </a:stretch>
+          <a:blip r:embed="rId12">
+            <a:extLst>
+              <a:ext uri="{28A0092B-C50C-407E-A947-70E740481C1C}">
+                <a14:useLocalDpi xmlns:a14="http://schemas.microsoft.com/office/drawing/2010/main" val="0"/>
+              </a:ext>
+            </a:extLst>
+          </a:blip>
+          <a:srcRect t="4" b="4"/>
+          <a:stretch/>
         </p:blipFill>
         <p:spPr>
           <a:xfrm>
-            <a:off x="13534601" y="5466463"/>
+            <a:off x="13754508" y="10867920"/>
             <a:ext cx="15292691" cy="12801600"/>
           </a:xfrm>
           <a:prstGeom prst="rect">
@@ -4607,8 +4562,8 @@
         </p:nvSpPr>
         <p:spPr>
           <a:xfrm>
-            <a:off x="13534601" y="18288214"/>
-            <a:ext cx="15343254" cy="1685846"/>
+            <a:off x="13659597" y="23712219"/>
+            <a:ext cx="15292691" cy="1685846"/>
           </a:xfrm>
           <a:prstGeom prst="rect">
             <a:avLst/>
@@ -4671,8 +4626,8 @@
         </p:nvSpPr>
         <p:spPr>
           <a:xfrm>
-            <a:off x="15367434" y="25817043"/>
-            <a:ext cx="10382467" cy="12292789"/>
+            <a:off x="29288702" y="4979210"/>
+            <a:ext cx="8686800" cy="15820678"/>
           </a:xfrm>
           <a:prstGeom prst="rect">
             <a:avLst/>
@@ -4712,7 +4667,7 @@
           <a:p>
             <a:pPr marL="685800" indent="-685800">
               <a:lnSpc>
-                <a:spcPct val="150000"/>
+                <a:spcPct val="175000"/>
               </a:lnSpc>
               <a:buFont typeface="Wingdings" panose="05000000000000000000" pitchFamily="2" charset="2"/>
               <a:buChar char="v"/>
@@ -4722,7 +4677,7 @@
                 <a:latin typeface="Arial" panose="020B0604020202020204" pitchFamily="34" charset="0"/>
                 <a:cs typeface="Arial" panose="020B0604020202020204" pitchFamily="34" charset="0"/>
               </a:rPr>
-              <a:t>No dataset represented more than </a:t>
+              <a:t>No dataset represented &gt;</a:t>
             </a:r>
             <a:r>
               <a:rPr lang="en-US" sz="2800" dirty="0">
@@ -4732,20 +4687,34 @@
                 <a:latin typeface="Arial" panose="020B0604020202020204" pitchFamily="34" charset="0"/>
                 <a:cs typeface="Arial" panose="020B0604020202020204" pitchFamily="34" charset="0"/>
               </a:rPr>
-              <a:t>70%</a:t>
+              <a:t>70% </a:t>
             </a:r>
             <a:r>
               <a:rPr lang="en-US" sz="2800" dirty="0">
                 <a:latin typeface="Arial" panose="020B0604020202020204" pitchFamily="34" charset="0"/>
                 <a:cs typeface="Arial" panose="020B0604020202020204" pitchFamily="34" charset="0"/>
               </a:rPr>
-              <a:t> of recognized primate species.</a:t>
+              <a:t>(376/535) of recognized primate species [12] (</a:t>
+            </a:r>
+            <a:r>
+              <a:rPr lang="en-US" sz="2800" b="1" dirty="0">
+                <a:latin typeface="Arial" panose="020B0604020202020204" pitchFamily="34" charset="0"/>
+                <a:cs typeface="Arial" panose="020B0604020202020204" pitchFamily="34" charset="0"/>
+              </a:rPr>
+              <a:t>Table 1</a:t>
+            </a:r>
+            <a:r>
+              <a:rPr lang="en-US" sz="2800" dirty="0">
+                <a:latin typeface="Arial" panose="020B0604020202020204" pitchFamily="34" charset="0"/>
+                <a:cs typeface="Arial" panose="020B0604020202020204" pitchFamily="34" charset="0"/>
+              </a:rPr>
+              <a:t>).</a:t>
             </a:r>
           </a:p>
           <a:p>
             <a:pPr marL="685800" indent="-685800">
               <a:lnSpc>
-                <a:spcPct val="150000"/>
+                <a:spcPct val="175000"/>
               </a:lnSpc>
               <a:buFont typeface="Wingdings" panose="05000000000000000000" pitchFamily="2" charset="2"/>
               <a:buChar char="v"/>
@@ -4755,21 +4724,7 @@
                 <a:latin typeface="Arial" panose="020B0604020202020204" pitchFamily="34" charset="0"/>
                 <a:cs typeface="Arial" panose="020B0604020202020204" pitchFamily="34" charset="0"/>
               </a:rPr>
-              <a:t>All</a:t>
-            </a:r>
-            <a:r>
-              <a:rPr lang="en-US" sz="2800" b="1" dirty="0">
-                <a:latin typeface="Arial" panose="020B0604020202020204" pitchFamily="34" charset="0"/>
-                <a:cs typeface="Arial" panose="020B0604020202020204" pitchFamily="34" charset="0"/>
-              </a:rPr>
-              <a:t> </a:t>
-            </a:r>
-            <a:r>
-              <a:rPr lang="en-US" sz="2800" dirty="0">
-                <a:latin typeface="Arial" panose="020B0604020202020204" pitchFamily="34" charset="0"/>
-                <a:cs typeface="Arial" panose="020B0604020202020204" pitchFamily="34" charset="0"/>
-              </a:rPr>
-              <a:t>datasets did not record </a:t>
+              <a:t>At</a:t>
             </a:r>
             <a:r>
               <a:rPr lang="en-US" sz="2800" dirty="0">
@@ -4779,20 +4734,34 @@
                 <a:latin typeface="Arial" panose="020B0604020202020204" pitchFamily="34" charset="0"/>
                 <a:cs typeface="Arial" panose="020B0604020202020204" pitchFamily="34" charset="0"/>
               </a:rPr>
-              <a:t>at least two</a:t>
+              <a:t> least two</a:t>
             </a:r>
             <a:r>
               <a:rPr lang="en-US" sz="2800" dirty="0">
                 <a:latin typeface="Arial" panose="020B0604020202020204" pitchFamily="34" charset="0"/>
                 <a:cs typeface="Arial" panose="020B0604020202020204" pitchFamily="34" charset="0"/>
               </a:rPr>
-              <a:t> of our “key” LH traits.</a:t>
+              <a:t> of our key life history traits were not recorded for each dataset. (</a:t>
+            </a:r>
+            <a:r>
+              <a:rPr lang="en-US" sz="2800" b="1" dirty="0">
+                <a:latin typeface="Arial" panose="020B0604020202020204" pitchFamily="34" charset="0"/>
+                <a:cs typeface="Arial" panose="020B0604020202020204" pitchFamily="34" charset="0"/>
+              </a:rPr>
+              <a:t>Figure 1</a:t>
+            </a:r>
+            <a:r>
+              <a:rPr lang="en-US" sz="2800" dirty="0">
+                <a:latin typeface="Arial" panose="020B0604020202020204" pitchFamily="34" charset="0"/>
+                <a:cs typeface="Arial" panose="020B0604020202020204" pitchFamily="34" charset="0"/>
+              </a:rPr>
+              <a:t>)</a:t>
             </a:r>
           </a:p>
           <a:p>
             <a:pPr marL="685800" indent="-685800">
               <a:lnSpc>
-                <a:spcPct val="150000"/>
+                <a:spcPct val="175000"/>
               </a:lnSpc>
               <a:buFont typeface="Wingdings" panose="05000000000000000000" pitchFamily="2" charset="2"/>
               <a:buChar char="v"/>
@@ -4812,13 +4781,34 @@
                 <a:latin typeface="Arial" panose="020B0604020202020204" pitchFamily="34" charset="0"/>
                 <a:cs typeface="Arial" panose="020B0604020202020204" pitchFamily="34" charset="0"/>
               </a:rPr>
-              <a:t>30.7 to 68.8%.</a:t>
+              <a:t>30.7 to 68.8%. </a:t>
+            </a:r>
+            <a:r>
+              <a:rPr lang="en-US" sz="2800" dirty="0">
+                <a:latin typeface="Arial" panose="020B0604020202020204" pitchFamily="34" charset="0"/>
+                <a:cs typeface="Arial" panose="020B0604020202020204" pitchFamily="34" charset="0"/>
+              </a:rPr>
+              <a:t>(</a:t>
+            </a:r>
+            <a:r>
+              <a:rPr lang="en-US" sz="2800" b="1" dirty="0">
+                <a:latin typeface="Arial" panose="020B0604020202020204" pitchFamily="34" charset="0"/>
+                <a:cs typeface="Arial" panose="020B0604020202020204" pitchFamily="34" charset="0"/>
+              </a:rPr>
+              <a:t>Figure 1</a:t>
+            </a:r>
+            <a:r>
+              <a:rPr lang="en-US" sz="2800" dirty="0">
+                <a:latin typeface="Arial" panose="020B0604020202020204" pitchFamily="34" charset="0"/>
+                <a:cs typeface="Arial" panose="020B0604020202020204" pitchFamily="34" charset="0"/>
+              </a:rPr>
+              <a:t>)</a:t>
             </a:r>
           </a:p>
           <a:p>
             <a:pPr marL="1143000" lvl="1" indent="-685800">
               <a:lnSpc>
-                <a:spcPct val="150000"/>
+                <a:spcPct val="175000"/>
               </a:lnSpc>
               <a:buFont typeface="Wingdings" panose="05000000000000000000" pitchFamily="2" charset="2"/>
               <a:buChar char="v"/>
@@ -4828,13 +4818,30 @@
                 <a:latin typeface="Arial" panose="020B0604020202020204" pitchFamily="34" charset="0"/>
                 <a:cs typeface="Arial" panose="020B0604020202020204" pitchFamily="34" charset="0"/>
               </a:rPr>
-              <a:t>[8] demonstrated the highest proportion of missing values</a:t>
-            </a:r>
-          </a:p>
-          <a:p>
-            <a:pPr marL="1143000" lvl="1" indent="-685800">
+              <a:t>Of the traits recorded in multiple datasets, </a:t>
+            </a:r>
+            <a:r>
+              <a:rPr lang="en-US" sz="2800" dirty="0">
+                <a:solidFill>
+                  <a:srgbClr val="FF0000"/>
+                </a:solidFill>
+                <a:latin typeface="Arial" panose="020B0604020202020204" pitchFamily="34" charset="0"/>
+                <a:cs typeface="Arial" panose="020B0604020202020204" pitchFamily="34" charset="0"/>
+              </a:rPr>
+              <a:t>AFR was the least complete among pooled data </a:t>
+            </a:r>
+            <a:r>
+              <a:rPr lang="en-US" sz="2800" dirty="0">
+                <a:latin typeface="Arial" panose="020B0604020202020204" pitchFamily="34" charset="0"/>
+                <a:cs typeface="Arial" panose="020B0604020202020204" pitchFamily="34" charset="0"/>
+              </a:rPr>
+              <a:t>with a proportion of missing values equal to .653.</a:t>
+            </a:r>
+          </a:p>
+          <a:p>
+            <a:pPr marL="685800" indent="-685800">
               <a:lnSpc>
-                <a:spcPct val="150000"/>
+                <a:spcPct val="175000"/>
               </a:lnSpc>
               <a:buFont typeface="Wingdings" panose="05000000000000000000" pitchFamily="2" charset="2"/>
               <a:buChar char="v"/>
@@ -4844,30 +4851,27 @@
                 <a:latin typeface="Arial" panose="020B0604020202020204" pitchFamily="34" charset="0"/>
                 <a:cs typeface="Arial" panose="020B0604020202020204" pitchFamily="34" charset="0"/>
               </a:rPr>
-              <a:t>Of the traits recorded in multiple datasets, </a:t>
+              <a:t>Despite dramatic differences in the number of species recorded, all datasets maintain relatively equal proportions of cladistic representation. (</a:t>
+            </a:r>
+            <a:r>
+              <a:rPr lang="en-US" sz="2800" b="1" dirty="0">
+                <a:latin typeface="Arial" panose="020B0604020202020204" pitchFamily="34" charset="0"/>
+                <a:cs typeface="Arial" panose="020B0604020202020204" pitchFamily="34" charset="0"/>
+              </a:rPr>
+              <a:t>Figure 2</a:t>
             </a:r>
             <a:r>
               <a:rPr lang="en-US" sz="2800" dirty="0">
-                <a:solidFill>
-                  <a:srgbClr val="FF0000"/>
-                </a:solidFill>
-                <a:latin typeface="Arial" panose="020B0604020202020204" pitchFamily="34" charset="0"/>
-                <a:cs typeface="Arial" panose="020B0604020202020204" pitchFamily="34" charset="0"/>
-              </a:rPr>
-              <a:t>AFR was the least complete among pooled data </a:t>
-            </a:r>
-            <a:r>
-              <a:rPr lang="en-US" sz="2800" dirty="0">
-                <a:latin typeface="Arial" panose="020B0604020202020204" pitchFamily="34" charset="0"/>
-                <a:cs typeface="Arial" panose="020B0604020202020204" pitchFamily="34" charset="0"/>
-              </a:rPr>
-              <a:t>with a proportion of missing values equal to .653.</a:t>
+                <a:latin typeface="Arial" panose="020B0604020202020204" pitchFamily="34" charset="0"/>
+                <a:cs typeface="Arial" panose="020B0604020202020204" pitchFamily="34" charset="0"/>
+              </a:rPr>
+              <a:t>)</a:t>
             </a:r>
           </a:p>
           <a:p>
             <a:pPr marL="685800" indent="-685800">
               <a:lnSpc>
-                <a:spcPct val="150000"/>
+                <a:spcPct val="175000"/>
               </a:lnSpc>
               <a:buFont typeface="Wingdings" panose="05000000000000000000" pitchFamily="2" charset="2"/>
               <a:buChar char="v"/>
@@ -4877,39 +4881,21 @@
                 <a:latin typeface="Arial" panose="020B0604020202020204" pitchFamily="34" charset="0"/>
                 <a:cs typeface="Arial" panose="020B0604020202020204" pitchFamily="34" charset="0"/>
               </a:rPr>
-              <a:t>Metadata content varied from complete and detailed to largely unavailable. For those with available metadata, quality and detail also ranged.</a:t>
-            </a:r>
-          </a:p>
-          <a:p>
-            <a:pPr marL="685800" indent="-685800">
-              <a:lnSpc>
-                <a:spcPct val="150000"/>
-              </a:lnSpc>
-              <a:buFont typeface="Wingdings" panose="05000000000000000000" pitchFamily="2" charset="2"/>
-              <a:buChar char="v"/>
-            </a:pPr>
+              <a:t>Metadata content varied from complete and detailed to largely unavailable. For those with available metadata, quality and detail also varied. (</a:t>
+            </a:r>
+            <a:r>
+              <a:rPr lang="en-US" sz="2800" b="1" dirty="0">
+                <a:latin typeface="Arial" panose="020B0604020202020204" pitchFamily="34" charset="0"/>
+                <a:cs typeface="Arial" panose="020B0604020202020204" pitchFamily="34" charset="0"/>
+              </a:rPr>
+              <a:t>Table 2</a:t>
+            </a:r>
             <a:r>
               <a:rPr lang="en-US" sz="2800" dirty="0">
                 <a:latin typeface="Arial" panose="020B0604020202020204" pitchFamily="34" charset="0"/>
                 <a:cs typeface="Arial" panose="020B0604020202020204" pitchFamily="34" charset="0"/>
               </a:rPr>
-              <a:t>ASM was significantly less dimorphic than adult mass across primates and within species (p &lt; .00001 &amp; p &lt; .001).</a:t>
-            </a:r>
-          </a:p>
-          <a:p>
-            <a:pPr marL="685800" indent="-685800">
-              <a:lnSpc>
-                <a:spcPct val="150000"/>
-              </a:lnSpc>
-              <a:buFont typeface="Wingdings" panose="05000000000000000000" pitchFamily="2" charset="2"/>
-              <a:buChar char="v"/>
-            </a:pPr>
-            <a:r>
-              <a:rPr lang="en-US" sz="2800" dirty="0">
-                <a:latin typeface="Arial" panose="020B0604020202020204" pitchFamily="34" charset="0"/>
-                <a:cs typeface="Arial" panose="020B0604020202020204" pitchFamily="34" charset="0"/>
-              </a:rPr>
-              <a:t>Despite dramatic differences in the number of species recorded, all datasets maintain relatively equal proportions of cladistic representation.</a:t>
+              <a:t>)</a:t>
             </a:r>
           </a:p>
         </p:txBody>
@@ -4928,8 +4914,8 @@
         </p:nvSpPr>
         <p:spPr>
           <a:xfrm>
-            <a:off x="26028186" y="26463374"/>
-            <a:ext cx="11914576" cy="11646458"/>
+            <a:off x="29305203" y="20960325"/>
+            <a:ext cx="8686800" cy="17113339"/>
           </a:xfrm>
           <a:prstGeom prst="rect">
             <a:avLst/>
@@ -4965,7 +4951,7 @@
           <a:p>
             <a:pPr marL="457200" indent="-457200">
               <a:lnSpc>
-                <a:spcPct val="150000"/>
+                <a:spcPct val="175000"/>
               </a:lnSpc>
               <a:buFont typeface="Wingdings" panose="05000000000000000000" pitchFamily="2" charset="2"/>
               <a:buChar char="v"/>
@@ -4975,13 +4961,13 @@
                 <a:latin typeface="Arial" panose="020B0604020202020204" pitchFamily="34" charset="0"/>
                 <a:cs typeface="Arial" panose="020B0604020202020204" pitchFamily="34" charset="0"/>
               </a:rPr>
-              <a:t>Existing datasets lack consistency in which traits are recorded, which species are included, and how traits are defined and measured.</a:t>
+              <a:t>Existing datasets lack consistency in which traits and species are included and how traits are defined and measured.</a:t>
             </a:r>
           </a:p>
           <a:p>
             <a:pPr marL="914400" lvl="1" indent="-457200">
               <a:lnSpc>
-                <a:spcPct val="150000"/>
+                <a:spcPct val="175000"/>
               </a:lnSpc>
               <a:buFont typeface="Wingdings" panose="05000000000000000000" pitchFamily="2" charset="2"/>
               <a:buChar char="v"/>
@@ -4991,13 +4977,13 @@
                 <a:latin typeface="Arial" panose="020B0604020202020204" pitchFamily="34" charset="0"/>
                 <a:cs typeface="Arial" panose="020B0604020202020204" pitchFamily="34" charset="0"/>
               </a:rPr>
-              <a:t>Ex: [2], [7], and [8] report AFR while [3,4] and [9] report ASM. Of the 117 species with data for both, AFR is younger than ASM for 82%. </a:t>
+              <a:t>Ex: Amniotes [11] and AnAge [7, 8] divide ASM by sex class, but not PanTHERIA [9]. Ernest [6] and Kappeler &amp; Pereira [12] record AFR instead.</a:t>
             </a:r>
           </a:p>
           <a:p>
             <a:pPr marL="914400" lvl="1" indent="-457200">
               <a:lnSpc>
-                <a:spcPct val="150000"/>
+                <a:spcPct val="175000"/>
               </a:lnSpc>
               <a:buFont typeface="Wingdings" panose="05000000000000000000" pitchFamily="2" charset="2"/>
               <a:buChar char="v"/>
@@ -5007,13 +4993,13 @@
                 <a:latin typeface="Arial" panose="020B0604020202020204" pitchFamily="34" charset="0"/>
                 <a:cs typeface="Arial" panose="020B0604020202020204" pitchFamily="34" charset="0"/>
               </a:rPr>
-              <a:t>Ex: IBI descriptions for Amniotes &amp; PanTHERIA specify live offspring, while KP doesn’t specify; AnAge lacks any description of IBI, and Ernest does not record data for IBI.</a:t>
+              <a:t>Ex: The Amniotes [11] &amp; PanTHERIA [9] definitions of IBI specify live offspring, while Kappeler &amp; Pereira [12] doesn’t specify; AnAge [7, 8] lacks any description. Ernest [6] does not record data for IBI.</a:t>
             </a:r>
           </a:p>
           <a:p>
             <a:pPr marL="457200" indent="-457200">
               <a:lnSpc>
-                <a:spcPct val="150000"/>
+                <a:spcPct val="175000"/>
               </a:lnSpc>
               <a:buFont typeface="Wingdings" panose="05000000000000000000" pitchFamily="2" charset="2"/>
               <a:buChar char="v"/>
@@ -5023,13 +5009,13 @@
                 <a:latin typeface="Arial" panose="020B0604020202020204" pitchFamily="34" charset="0"/>
                 <a:cs typeface="Arial" panose="020B0604020202020204" pitchFamily="34" charset="0"/>
               </a:rPr>
-              <a:t>When designing a study, researchers should carefully consider which variables to use and how their specific source defines them.</a:t>
+              <a:t>When collating many datasets, researchers should be aware of redundant data points and inconsistent recording methods.</a:t>
             </a:r>
           </a:p>
           <a:p>
             <a:pPr marL="457200" indent="-457200">
               <a:lnSpc>
-                <a:spcPct val="150000"/>
+                <a:spcPct val="175000"/>
               </a:lnSpc>
               <a:buFont typeface="Wingdings" panose="05000000000000000000" pitchFamily="2" charset="2"/>
               <a:buChar char="v"/>
@@ -5039,13 +5025,13 @@
                 <a:latin typeface="Arial" panose="020B0604020202020204" pitchFamily="34" charset="0"/>
                 <a:cs typeface="Arial" panose="020B0604020202020204" pitchFamily="34" charset="0"/>
               </a:rPr>
-              <a:t>When collating many datasets, researchers should be aware of redundant data points and inconsistent recording methods.</a:t>
+              <a:t>When compiling life history data, researchers should maintain thorough and accessible metadata to aid researchers using their dataset.</a:t>
             </a:r>
           </a:p>
           <a:p>
             <a:pPr marL="457200" indent="-457200">
               <a:lnSpc>
-                <a:spcPct val="150000"/>
+                <a:spcPct val="175000"/>
               </a:lnSpc>
               <a:buFont typeface="Wingdings" panose="05000000000000000000" pitchFamily="2" charset="2"/>
               <a:buChar char="v"/>
@@ -5055,23 +5041,7 @@
                 <a:latin typeface="Arial" panose="020B0604020202020204" pitchFamily="34" charset="0"/>
                 <a:cs typeface="Arial" panose="020B0604020202020204" pitchFamily="34" charset="0"/>
               </a:rPr>
-              <a:t>When compiling life history data, researchers should maintain thorough and accessible metadata to aid researchers using their dataset.</a:t>
-            </a:r>
-          </a:p>
-          <a:p>
-            <a:pPr marL="457200" indent="-457200">
-              <a:lnSpc>
-                <a:spcPct val="150000"/>
-              </a:lnSpc>
-              <a:buFont typeface="Wingdings" panose="05000000000000000000" pitchFamily="2" charset="2"/>
-              <a:buChar char="v"/>
-            </a:pPr>
-            <a:r>
-              <a:rPr lang="en-US" sz="2800" dirty="0">
-                <a:latin typeface="Arial" panose="020B0604020202020204" pitchFamily="34" charset="0"/>
-                <a:cs typeface="Arial" panose="020B0604020202020204" pitchFamily="34" charset="0"/>
-              </a:rPr>
-              <a:t>Going forward, anthropologists must come together to establish LH data collection protocols and a standardized repository filled with reliable and accurate data. </a:t>
+              <a:t>We must establish protocols for collecting life history data and a standardized repository filled with reliable and accurate data. </a:t>
             </a:r>
           </a:p>
         </p:txBody>
@@ -5165,8 +5135,8 @@
         </p:blipFill>
         <p:spPr>
           <a:xfrm>
-            <a:off x="4853236" y="30676005"/>
-            <a:ext cx="10119365" cy="6969521"/>
+            <a:off x="13649081" y="25398065"/>
+            <a:ext cx="15288766" cy="7644383"/>
           </a:xfrm>
           <a:prstGeom prst="rect">
             <a:avLst/>
@@ -5193,14 +5163,14 @@
           <p:nvPr>
             <p:extLst>
               <p:ext uri="{D42A27DB-BD31-4B8C-83A1-F6EECF244321}">
-                <p14:modId xmlns:p14="http://schemas.microsoft.com/office/powerpoint/2010/main" val="259807388"/>
+                <p14:modId xmlns:p14="http://schemas.microsoft.com/office/powerpoint/2010/main" val="2354439262"/>
               </p:ext>
             </p:extLst>
           </p:nvPr>
         </p:nvGraphicFramePr>
         <p:xfrm>
-          <a:off x="13759607" y="21665104"/>
-          <a:ext cx="14917651" cy="3718560"/>
+          <a:off x="13734842" y="6957709"/>
+          <a:ext cx="15292691" cy="3718560"/>
         </p:xfrm>
         <a:graphic>
           <a:graphicData uri="http://schemas.openxmlformats.org/drawingml/2006/table">
@@ -5209,49 +5179,49 @@
                 <a:tableStyleId>{5C22544A-7EE6-4342-B048-85BDC9FD1C3A}</a:tableStyleId>
               </a:tblPr>
               <a:tblGrid>
-                <a:gridCol w="2432792">
+                <a:gridCol w="2493954">
                   <a:extLst>
                     <a:ext uri="{9D8B030D-6E8A-4147-A177-3AD203B41FA5}">
                       <a16:colId xmlns:a16="http://schemas.microsoft.com/office/drawing/2014/main" val="2495585869"/>
                     </a:ext>
                   </a:extLst>
                 </a:gridCol>
-                <a:gridCol w="1582588">
+                <a:gridCol w="1622375">
                   <a:extLst>
                     <a:ext uri="{9D8B030D-6E8A-4147-A177-3AD203B41FA5}">
                       <a16:colId xmlns:a16="http://schemas.microsoft.com/office/drawing/2014/main" val="984202891"/>
                     </a:ext>
                   </a:extLst>
                 </a:gridCol>
-                <a:gridCol w="2329921">
+                <a:gridCol w="2388497">
                   <a:extLst>
                     <a:ext uri="{9D8B030D-6E8A-4147-A177-3AD203B41FA5}">
                       <a16:colId xmlns:a16="http://schemas.microsoft.com/office/drawing/2014/main" val="1450671555"/>
                     </a:ext>
                   </a:extLst>
                 </a:gridCol>
-                <a:gridCol w="1921186">
+                <a:gridCol w="1969486">
                   <a:extLst>
                     <a:ext uri="{9D8B030D-6E8A-4147-A177-3AD203B41FA5}">
                       <a16:colId xmlns:a16="http://schemas.microsoft.com/office/drawing/2014/main" val="2092606652"/>
                     </a:ext>
                   </a:extLst>
                 </a:gridCol>
-                <a:gridCol w="2010534">
+                <a:gridCol w="2061080">
                   <a:extLst>
                     <a:ext uri="{9D8B030D-6E8A-4147-A177-3AD203B41FA5}">
                       <a16:colId xmlns:a16="http://schemas.microsoft.com/office/drawing/2014/main" val="3671337353"/>
                     </a:ext>
                   </a:extLst>
                 </a:gridCol>
-                <a:gridCol w="2338827">
+                <a:gridCol w="2397627">
                   <a:extLst>
                     <a:ext uri="{9D8B030D-6E8A-4147-A177-3AD203B41FA5}">
                       <a16:colId xmlns:a16="http://schemas.microsoft.com/office/drawing/2014/main" val="1165741138"/>
                     </a:ext>
                   </a:extLst>
                 </a:gridCol>
-                <a:gridCol w="2301803">
+                <a:gridCol w="2359672">
                   <a:extLst>
                     <a:ext uri="{9D8B030D-6E8A-4147-A177-3AD203B41FA5}">
                       <a16:colId xmlns:a16="http://schemas.microsoft.com/office/drawing/2014/main" val="3607082557"/>
@@ -5265,8 +5235,15 @@
                     <a:bodyPr/>
                     <a:lstStyle/>
                     <a:p>
+                      <a:pPr algn="ctr"/>
                       <a:r>
                         <a:rPr lang="en-US" sz="2600" b="0" dirty="0">
+                          <a:ln w="0">
+                            <a:noFill/>
+                          </a:ln>
+                          <a:solidFill>
+                            <a:schemeClr val="bg1"/>
+                          </a:solidFill>
                           <a:latin typeface="Arial" panose="020B0604020202020204" pitchFamily="34" charset="0"/>
                           <a:cs typeface="Arial" panose="020B0604020202020204" pitchFamily="34" charset="0"/>
                         </a:rPr>
@@ -5274,15 +5251,26 @@
                       </a:r>
                     </a:p>
                   </a:txBody>
-                  <a:tcPr/>
+                  <a:tcPr anchor="ctr">
+                    <a:solidFill>
+                      <a:srgbClr val="8B79EE"/>
+                    </a:solidFill>
+                  </a:tcPr>
                 </a:tc>
                 <a:tc>
                   <a:txBody>
                     <a:bodyPr/>
                     <a:lstStyle/>
                     <a:p>
+                      <a:pPr algn="ctr"/>
                       <a:r>
                         <a:rPr lang="en-US" sz="2600" b="0" dirty="0">
+                          <a:ln w="0">
+                            <a:noFill/>
+                          </a:ln>
+                          <a:solidFill>
+                            <a:schemeClr val="bg1"/>
+                          </a:solidFill>
                           <a:latin typeface="Arial" panose="020B0604020202020204" pitchFamily="34" charset="0"/>
                           <a:cs typeface="Arial" panose="020B0604020202020204" pitchFamily="34" charset="0"/>
                         </a:rPr>
@@ -5290,15 +5278,26 @@
                       </a:r>
                     </a:p>
                   </a:txBody>
-                  <a:tcPr/>
+                  <a:tcPr anchor="ctr">
+                    <a:solidFill>
+                      <a:srgbClr val="8B79EE"/>
+                    </a:solidFill>
+                  </a:tcPr>
                 </a:tc>
                 <a:tc>
                   <a:txBody>
                     <a:bodyPr/>
                     <a:lstStyle/>
                     <a:p>
+                      <a:pPr algn="ctr"/>
                       <a:r>
                         <a:rPr lang="en-US" sz="2600" b="0" dirty="0">
+                          <a:ln w="0">
+                            <a:noFill/>
+                          </a:ln>
+                          <a:solidFill>
+                            <a:schemeClr val="bg1"/>
+                          </a:solidFill>
                           <a:latin typeface="Arial" panose="020B0604020202020204" pitchFamily="34" charset="0"/>
                           <a:cs typeface="Arial" panose="020B0604020202020204" pitchFamily="34" charset="0"/>
                         </a:rPr>
@@ -5306,15 +5305,26 @@
                       </a:r>
                     </a:p>
                   </a:txBody>
-                  <a:tcPr/>
+                  <a:tcPr anchor="ctr">
+                    <a:solidFill>
+                      <a:srgbClr val="8B79EE"/>
+                    </a:solidFill>
+                  </a:tcPr>
                 </a:tc>
                 <a:tc>
                   <a:txBody>
                     <a:bodyPr/>
                     <a:lstStyle/>
                     <a:p>
+                      <a:pPr algn="ctr"/>
                       <a:r>
                         <a:rPr lang="en-US" sz="2600" b="0" dirty="0">
+                          <a:ln w="0">
+                            <a:noFill/>
+                          </a:ln>
+                          <a:solidFill>
+                            <a:schemeClr val="bg1"/>
+                          </a:solidFill>
                           <a:latin typeface="Arial" panose="020B0604020202020204" pitchFamily="34" charset="0"/>
                           <a:cs typeface="Arial" panose="020B0604020202020204" pitchFamily="34" charset="0"/>
                         </a:rPr>
@@ -5322,15 +5332,26 @@
                       </a:r>
                     </a:p>
                   </a:txBody>
-                  <a:tcPr/>
+                  <a:tcPr anchor="ctr">
+                    <a:solidFill>
+                      <a:srgbClr val="8B79EE"/>
+                    </a:solidFill>
+                  </a:tcPr>
                 </a:tc>
                 <a:tc>
                   <a:txBody>
                     <a:bodyPr/>
                     <a:lstStyle/>
                     <a:p>
+                      <a:pPr algn="ctr"/>
                       <a:r>
                         <a:rPr lang="en-US" sz="2600" b="0" dirty="0">
+                          <a:ln w="0">
+                            <a:noFill/>
+                          </a:ln>
+                          <a:solidFill>
+                            <a:schemeClr val="bg1"/>
+                          </a:solidFill>
                           <a:latin typeface="Arial" panose="020B0604020202020204" pitchFamily="34" charset="0"/>
                           <a:cs typeface="Arial" panose="020B0604020202020204" pitchFamily="34" charset="0"/>
                         </a:rPr>
@@ -5338,15 +5359,26 @@
                       </a:r>
                     </a:p>
                   </a:txBody>
-                  <a:tcPr/>
+                  <a:tcPr anchor="ctr">
+                    <a:solidFill>
+                      <a:srgbClr val="8B79EE"/>
+                    </a:solidFill>
+                  </a:tcPr>
                 </a:tc>
                 <a:tc>
                   <a:txBody>
                     <a:bodyPr/>
                     <a:lstStyle/>
                     <a:p>
+                      <a:pPr algn="ctr"/>
                       <a:r>
                         <a:rPr lang="en-US" sz="2600" b="0" dirty="0">
+                          <a:ln w="0">
+                            <a:noFill/>
+                          </a:ln>
+                          <a:solidFill>
+                            <a:schemeClr val="bg1"/>
+                          </a:solidFill>
                           <a:latin typeface="Arial" panose="020B0604020202020204" pitchFamily="34" charset="0"/>
                           <a:cs typeface="Arial" panose="020B0604020202020204" pitchFamily="34" charset="0"/>
                         </a:rPr>
@@ -5354,15 +5386,26 @@
                       </a:r>
                     </a:p>
                   </a:txBody>
-                  <a:tcPr/>
+                  <a:tcPr anchor="ctr">
+                    <a:solidFill>
+                      <a:srgbClr val="8B79EE"/>
+                    </a:solidFill>
+                  </a:tcPr>
                 </a:tc>
                 <a:tc>
                   <a:txBody>
                     <a:bodyPr/>
                     <a:lstStyle/>
                     <a:p>
+                      <a:pPr algn="ctr"/>
                       <a:r>
                         <a:rPr lang="en-US" sz="2600" b="0" dirty="0">
+                          <a:ln w="0">
+                            <a:noFill/>
+                          </a:ln>
+                          <a:solidFill>
+                            <a:schemeClr val="bg1"/>
+                          </a:solidFill>
                           <a:latin typeface="Arial" panose="020B0604020202020204" pitchFamily="34" charset="0"/>
                           <a:cs typeface="Arial" panose="020B0604020202020204" pitchFamily="34" charset="0"/>
                         </a:rPr>
@@ -5370,7 +5413,11 @@
                       </a:r>
                     </a:p>
                   </a:txBody>
-                  <a:tcPr/>
+                  <a:tcPr anchor="ctr">
+                    <a:solidFill>
+                      <a:srgbClr val="8B79EE"/>
+                    </a:solidFill>
+                  </a:tcPr>
                 </a:tc>
                 <a:extLst>
                   <a:ext uri="{0D108BD9-81ED-4DB2-BD59-A6C34878D82A}">
@@ -5393,7 +5440,11 @@
                       </a:r>
                     </a:p>
                   </a:txBody>
-                  <a:tcPr/>
+                  <a:tcPr>
+                    <a:solidFill>
+                      <a:srgbClr val="CDCDC1"/>
+                    </a:solidFill>
+                  </a:tcPr>
                 </a:tc>
                 <a:tc>
                   <a:txBody>
@@ -5409,7 +5460,11 @@
                       </a:r>
                     </a:p>
                   </a:txBody>
-                  <a:tcPr/>
+                  <a:tcPr>
+                    <a:solidFill>
+                      <a:srgbClr val="CDCDC1"/>
+                    </a:solidFill>
+                  </a:tcPr>
                 </a:tc>
                 <a:tc>
                   <a:txBody>
@@ -5425,7 +5480,11 @@
                       </a:r>
                     </a:p>
                   </a:txBody>
-                  <a:tcPr/>
+                  <a:tcPr>
+                    <a:solidFill>
+                      <a:srgbClr val="CDCDC1"/>
+                    </a:solidFill>
+                  </a:tcPr>
                 </a:tc>
                 <a:tc>
                   <a:txBody>
@@ -5441,7 +5500,11 @@
                       </a:r>
                     </a:p>
                   </a:txBody>
-                  <a:tcPr/>
+                  <a:tcPr>
+                    <a:solidFill>
+                      <a:srgbClr val="CDCDC1"/>
+                    </a:solidFill>
+                  </a:tcPr>
                 </a:tc>
                 <a:tc>
                   <a:txBody>
@@ -5457,7 +5520,11 @@
                       </a:r>
                     </a:p>
                   </a:txBody>
-                  <a:tcPr/>
+                  <a:tcPr>
+                    <a:solidFill>
+                      <a:srgbClr val="CDCDC1"/>
+                    </a:solidFill>
+                  </a:tcPr>
                 </a:tc>
                 <a:tc>
                   <a:txBody>
@@ -5473,7 +5540,11 @@
                       </a:r>
                     </a:p>
                   </a:txBody>
-                  <a:tcPr/>
+                  <a:tcPr>
+                    <a:solidFill>
+                      <a:srgbClr val="CDCDC1"/>
+                    </a:solidFill>
+                  </a:tcPr>
                 </a:tc>
                 <a:tc>
                   <a:txBody>
@@ -5489,7 +5560,11 @@
                       </a:r>
                     </a:p>
                   </a:txBody>
-                  <a:tcPr/>
+                  <a:tcPr>
+                    <a:solidFill>
+                      <a:srgbClr val="CDCDC1"/>
+                    </a:solidFill>
+                  </a:tcPr>
                 </a:tc>
                 <a:extLst>
                   <a:ext uri="{0D108BD9-81ED-4DB2-BD59-A6C34878D82A}">
@@ -5512,7 +5587,11 @@
                       </a:r>
                     </a:p>
                   </a:txBody>
-                  <a:tcPr/>
+                  <a:tcPr>
+                    <a:solidFill>
+                      <a:srgbClr val="CDCDC1"/>
+                    </a:solidFill>
+                  </a:tcPr>
                 </a:tc>
                 <a:tc>
                   <a:txBody>
@@ -5528,7 +5607,11 @@
                       </a:r>
                     </a:p>
                   </a:txBody>
-                  <a:tcPr/>
+                  <a:tcPr>
+                    <a:solidFill>
+                      <a:srgbClr val="CDCDC1"/>
+                    </a:solidFill>
+                  </a:tcPr>
                 </a:tc>
                 <a:tc>
                   <a:txBody>
@@ -5544,7 +5627,11 @@
                       </a:r>
                     </a:p>
                   </a:txBody>
-                  <a:tcPr/>
+                  <a:tcPr>
+                    <a:solidFill>
+                      <a:srgbClr val="CDCDC1"/>
+                    </a:solidFill>
+                  </a:tcPr>
                 </a:tc>
                 <a:tc>
                   <a:txBody>
@@ -5560,7 +5647,11 @@
                       </a:r>
                     </a:p>
                   </a:txBody>
-                  <a:tcPr/>
+                  <a:tcPr>
+                    <a:solidFill>
+                      <a:srgbClr val="CDCDC1"/>
+                    </a:solidFill>
+                  </a:tcPr>
                 </a:tc>
                 <a:tc>
                   <a:txBody>
@@ -5576,7 +5667,11 @@
                       </a:r>
                     </a:p>
                   </a:txBody>
-                  <a:tcPr/>
+                  <a:tcPr>
+                    <a:solidFill>
+                      <a:srgbClr val="CDCDC1"/>
+                    </a:solidFill>
+                  </a:tcPr>
                 </a:tc>
                 <a:tc>
                   <a:txBody>
@@ -5592,7 +5687,11 @@
                       </a:r>
                     </a:p>
                   </a:txBody>
-                  <a:tcPr/>
+                  <a:tcPr>
+                    <a:solidFill>
+                      <a:srgbClr val="CDCDC1"/>
+                    </a:solidFill>
+                  </a:tcPr>
                 </a:tc>
                 <a:tc>
                   <a:txBody>
@@ -5608,7 +5707,11 @@
                       </a:r>
                     </a:p>
                   </a:txBody>
-                  <a:tcPr/>
+                  <a:tcPr>
+                    <a:solidFill>
+                      <a:srgbClr val="CDCDC1"/>
+                    </a:solidFill>
+                  </a:tcPr>
                 </a:tc>
                 <a:extLst>
                   <a:ext uri="{0D108BD9-81ED-4DB2-BD59-A6C34878D82A}">
@@ -5631,7 +5734,11 @@
                       </a:r>
                     </a:p>
                   </a:txBody>
-                  <a:tcPr/>
+                  <a:tcPr>
+                    <a:solidFill>
+                      <a:srgbClr val="CDCDC1"/>
+                    </a:solidFill>
+                  </a:tcPr>
                 </a:tc>
                 <a:tc>
                   <a:txBody>
@@ -5647,7 +5754,11 @@
                       </a:r>
                     </a:p>
                   </a:txBody>
-                  <a:tcPr/>
+                  <a:tcPr>
+                    <a:solidFill>
+                      <a:srgbClr val="CDCDC1"/>
+                    </a:solidFill>
+                  </a:tcPr>
                 </a:tc>
                 <a:tc>
                   <a:txBody>
@@ -5663,7 +5774,11 @@
                       </a:r>
                     </a:p>
                   </a:txBody>
-                  <a:tcPr/>
+                  <a:tcPr>
+                    <a:solidFill>
+                      <a:srgbClr val="CDCDC1"/>
+                    </a:solidFill>
+                  </a:tcPr>
                 </a:tc>
                 <a:tc>
                   <a:txBody>
@@ -5679,7 +5794,11 @@
                       </a:r>
                     </a:p>
                   </a:txBody>
-                  <a:tcPr/>
+                  <a:tcPr>
+                    <a:solidFill>
+                      <a:srgbClr val="CDCDC1"/>
+                    </a:solidFill>
+                  </a:tcPr>
                 </a:tc>
                 <a:tc>
                   <a:txBody>
@@ -5695,7 +5814,11 @@
                       </a:r>
                     </a:p>
                   </a:txBody>
-                  <a:tcPr/>
+                  <a:tcPr>
+                    <a:solidFill>
+                      <a:srgbClr val="CDCDC1"/>
+                    </a:solidFill>
+                  </a:tcPr>
                 </a:tc>
                 <a:tc>
                   <a:txBody>
@@ -5711,7 +5834,11 @@
                       </a:r>
                     </a:p>
                   </a:txBody>
-                  <a:tcPr/>
+                  <a:tcPr>
+                    <a:solidFill>
+                      <a:srgbClr val="CDCDC1"/>
+                    </a:solidFill>
+                  </a:tcPr>
                 </a:tc>
                 <a:tc>
                   <a:txBody>
@@ -5727,7 +5854,11 @@
                       </a:r>
                     </a:p>
                   </a:txBody>
-                  <a:tcPr/>
+                  <a:tcPr>
+                    <a:solidFill>
+                      <a:srgbClr val="CDCDC1"/>
+                    </a:solidFill>
+                  </a:tcPr>
                 </a:tc>
                 <a:extLst>
                   <a:ext uri="{0D108BD9-81ED-4DB2-BD59-A6C34878D82A}">
@@ -5750,7 +5881,11 @@
                       </a:r>
                     </a:p>
                   </a:txBody>
-                  <a:tcPr/>
+                  <a:tcPr>
+                    <a:solidFill>
+                      <a:srgbClr val="CDCDC1"/>
+                    </a:solidFill>
+                  </a:tcPr>
                 </a:tc>
                 <a:tc>
                   <a:txBody>
@@ -5766,7 +5901,11 @@
                       </a:r>
                     </a:p>
                   </a:txBody>
-                  <a:tcPr/>
+                  <a:tcPr>
+                    <a:solidFill>
+                      <a:srgbClr val="CDCDC1"/>
+                    </a:solidFill>
+                  </a:tcPr>
                 </a:tc>
                 <a:tc>
                   <a:txBody>
@@ -5782,7 +5921,11 @@
                       </a:r>
                     </a:p>
                   </a:txBody>
-                  <a:tcPr/>
+                  <a:tcPr>
+                    <a:solidFill>
+                      <a:srgbClr val="CDCDC1"/>
+                    </a:solidFill>
+                  </a:tcPr>
                 </a:tc>
                 <a:tc>
                   <a:txBody>
@@ -5798,7 +5941,11 @@
                       </a:r>
                     </a:p>
                   </a:txBody>
-                  <a:tcPr/>
+                  <a:tcPr>
+                    <a:solidFill>
+                      <a:srgbClr val="CDCDC1"/>
+                    </a:solidFill>
+                  </a:tcPr>
                 </a:tc>
                 <a:tc>
                   <a:txBody>
@@ -5814,7 +5961,11 @@
                       </a:r>
                     </a:p>
                   </a:txBody>
-                  <a:tcPr/>
+                  <a:tcPr>
+                    <a:solidFill>
+                      <a:srgbClr val="CDCDC1"/>
+                    </a:solidFill>
+                  </a:tcPr>
                 </a:tc>
                 <a:tc>
                   <a:txBody>
@@ -5830,7 +5981,11 @@
                       </a:r>
                     </a:p>
                   </a:txBody>
-                  <a:tcPr/>
+                  <a:tcPr>
+                    <a:solidFill>
+                      <a:srgbClr val="CDCDC1"/>
+                    </a:solidFill>
+                  </a:tcPr>
                 </a:tc>
                 <a:tc>
                   <a:txBody>
@@ -5846,7 +6001,11 @@
                       </a:r>
                     </a:p>
                   </a:txBody>
-                  <a:tcPr/>
+                  <a:tcPr>
+                    <a:solidFill>
+                      <a:srgbClr val="CDCDC1"/>
+                    </a:solidFill>
+                  </a:tcPr>
                 </a:tc>
                 <a:extLst>
                   <a:ext uri="{0D108BD9-81ED-4DB2-BD59-A6C34878D82A}">
@@ -5869,7 +6028,11 @@
                       </a:r>
                     </a:p>
                   </a:txBody>
-                  <a:tcPr/>
+                  <a:tcPr>
+                    <a:solidFill>
+                      <a:srgbClr val="CDCDC1"/>
+                    </a:solidFill>
+                  </a:tcPr>
                 </a:tc>
                 <a:tc>
                   <a:txBody>
@@ -5885,7 +6048,11 @@
                       </a:r>
                     </a:p>
                   </a:txBody>
-                  <a:tcPr/>
+                  <a:tcPr>
+                    <a:solidFill>
+                      <a:srgbClr val="CDCDC1"/>
+                    </a:solidFill>
+                  </a:tcPr>
                 </a:tc>
                 <a:tc>
                   <a:txBody>
@@ -5901,7 +6068,11 @@
                       </a:r>
                     </a:p>
                   </a:txBody>
-                  <a:tcPr/>
+                  <a:tcPr>
+                    <a:solidFill>
+                      <a:srgbClr val="CDCDC1"/>
+                    </a:solidFill>
+                  </a:tcPr>
                 </a:tc>
                 <a:tc>
                   <a:txBody>
@@ -5917,7 +6088,11 @@
                       </a:r>
                     </a:p>
                   </a:txBody>
-                  <a:tcPr/>
+                  <a:tcPr>
+                    <a:solidFill>
+                      <a:srgbClr val="CDCDC1"/>
+                    </a:solidFill>
+                  </a:tcPr>
                 </a:tc>
                 <a:tc>
                   <a:txBody>
@@ -5933,7 +6108,11 @@
                       </a:r>
                     </a:p>
                   </a:txBody>
-                  <a:tcPr/>
+                  <a:tcPr>
+                    <a:solidFill>
+                      <a:srgbClr val="CDCDC1"/>
+                    </a:solidFill>
+                  </a:tcPr>
                 </a:tc>
                 <a:tc>
                   <a:txBody>
@@ -5949,7 +6128,11 @@
                       </a:r>
                     </a:p>
                   </a:txBody>
-                  <a:tcPr/>
+                  <a:tcPr>
+                    <a:solidFill>
+                      <a:srgbClr val="CDCDC1"/>
+                    </a:solidFill>
+                  </a:tcPr>
                 </a:tc>
                 <a:tc>
                   <a:txBody>
@@ -5965,7 +6148,11 @@
                       </a:r>
                     </a:p>
                   </a:txBody>
-                  <a:tcPr/>
+                  <a:tcPr>
+                    <a:solidFill>
+                      <a:srgbClr val="CDCDC1"/>
+                    </a:solidFill>
+                  </a:tcPr>
                 </a:tc>
                 <a:extLst>
                   <a:ext uri="{0D108BD9-81ED-4DB2-BD59-A6C34878D82A}">
@@ -5991,8 +6178,8 @@
         </p:nvSpPr>
         <p:spPr>
           <a:xfrm>
-            <a:off x="13759607" y="19901007"/>
-            <a:ext cx="14917652" cy="1697644"/>
+            <a:off x="13715177" y="5210745"/>
+            <a:ext cx="15312356" cy="1697644"/>
           </a:xfrm>
           <a:prstGeom prst="rect">
             <a:avLst/>
@@ -6025,7 +6212,7 @@
                 <a:latin typeface="Arial" panose="020B0604020202020204" pitchFamily="34" charset="0"/>
                 <a:cs typeface="Arial" panose="020B0604020202020204" pitchFamily="34" charset="0"/>
               </a:rPr>
-              <a:t>Descriptive statistics of primate life-history statistics for each database. AnAge is the only database that is continually updated, with its last update in 2023. Each database has fewer missing values for our selected key life-history traits compared to all recorded statistics.</a:t>
+              <a:t>Descriptive statistics of primate life-history characteristics for each database. AnAge is the only database that is continually updated, with its last update in 2023. Each database has fewer missing values for our selected key life-history traits compared to all recorded statistics.</a:t>
             </a:r>
             <a:endParaRPr lang="en-US" sz="2400" dirty="0"/>
           </a:p>
@@ -6045,8 +6232,8 @@
         </p:nvSpPr>
         <p:spPr>
           <a:xfrm>
-            <a:off x="4736689" y="37561479"/>
-            <a:ext cx="10986532" cy="577850"/>
+            <a:off x="13649080" y="32905130"/>
+            <a:ext cx="15288768" cy="577850"/>
           </a:xfrm>
           <a:prstGeom prst="rect">
             <a:avLst/>
@@ -6103,14 +6290,14 @@
           <p:nvPr>
             <p:extLst>
               <p:ext uri="{D42A27DB-BD31-4B8C-83A1-F6EECF244321}">
-                <p14:modId xmlns:p14="http://schemas.microsoft.com/office/powerpoint/2010/main" val="916654302"/>
+                <p14:modId xmlns:p14="http://schemas.microsoft.com/office/powerpoint/2010/main" val="208697180"/>
               </p:ext>
             </p:extLst>
           </p:nvPr>
         </p:nvGraphicFramePr>
         <p:xfrm>
-          <a:off x="4736689" y="25759939"/>
-          <a:ext cx="10352460" cy="4724400"/>
+          <a:off x="13649080" y="34537984"/>
+          <a:ext cx="15378453" cy="3535680"/>
         </p:xfrm>
         <a:graphic>
           <a:graphicData uri="http://schemas.openxmlformats.org/drawingml/2006/table">
@@ -6119,28 +6306,28 @@
                 <a:tableStyleId>{5C22544A-7EE6-4342-B048-85BDC9FD1C3A}</a:tableStyleId>
               </a:tblPr>
               <a:tblGrid>
-                <a:gridCol w="1799885">
+                <a:gridCol w="2673708">
                   <a:extLst>
                     <a:ext uri="{9D8B030D-6E8A-4147-A177-3AD203B41FA5}">
                       <a16:colId xmlns:a16="http://schemas.microsoft.com/office/drawing/2014/main" val="2953196259"/>
                     </a:ext>
                   </a:extLst>
                 </a:gridCol>
-                <a:gridCol w="1212330">
+                <a:gridCol w="1800901">
                   <a:extLst>
                     <a:ext uri="{9D8B030D-6E8A-4147-A177-3AD203B41FA5}">
                       <a16:colId xmlns:a16="http://schemas.microsoft.com/office/drawing/2014/main" val="2850544499"/>
                     </a:ext>
                   </a:extLst>
                 </a:gridCol>
-                <a:gridCol w="3176461">
+                <a:gridCol w="4718594">
                   <a:extLst>
                     <a:ext uri="{9D8B030D-6E8A-4147-A177-3AD203B41FA5}">
                       <a16:colId xmlns:a16="http://schemas.microsoft.com/office/drawing/2014/main" val="3719952992"/>
                     </a:ext>
                   </a:extLst>
                 </a:gridCol>
-                <a:gridCol w="4163784">
+                <a:gridCol w="6185250">
                   <a:extLst>
                     <a:ext uri="{9D8B030D-6E8A-4147-A177-3AD203B41FA5}">
                       <a16:colId xmlns:a16="http://schemas.microsoft.com/office/drawing/2014/main" val="569871792"/>
@@ -6154,52 +6341,72 @@
                     <a:bodyPr/>
                     <a:lstStyle/>
                     <a:p>
+                      <a:pPr algn="ctr"/>
                       <a:r>
                         <a:rPr lang="en-US" sz="2600" b="0" dirty="0"/>
                         <a:t>Variable</a:t>
                       </a:r>
                     </a:p>
                   </a:txBody>
-                  <a:tcPr/>
+                  <a:tcPr anchor="ctr">
+                    <a:solidFill>
+                      <a:srgbClr val="8B79EE"/>
+                    </a:solidFill>
+                  </a:tcPr>
                 </a:tc>
                 <a:tc>
                   <a:txBody>
                     <a:bodyPr/>
                     <a:lstStyle/>
                     <a:p>
+                      <a:pPr algn="ctr"/>
                       <a:r>
                         <a:rPr lang="en-US" sz="2600" b="0" dirty="0"/>
                         <a:t>N unit types</a:t>
                       </a:r>
                     </a:p>
                   </a:txBody>
-                  <a:tcPr/>
+                  <a:tcPr anchor="ctr">
+                    <a:solidFill>
+                      <a:srgbClr val="8B79EE"/>
+                    </a:solidFill>
+                  </a:tcPr>
                 </a:tc>
                 <a:tc>
                   <a:txBody>
                     <a:bodyPr/>
                     <a:lstStyle/>
                     <a:p>
+                      <a:pPr algn="ctr"/>
                       <a:r>
                         <a:rPr lang="en-US" sz="2600" b="0" dirty="0"/>
                         <a:t>Description</a:t>
                       </a:r>
                     </a:p>
                   </a:txBody>
-                  <a:tcPr/>
+                  <a:tcPr anchor="ctr">
+                    <a:solidFill>
+                      <a:srgbClr val="8B79EE"/>
+                    </a:solidFill>
+                  </a:tcPr>
                 </a:tc>
                 <a:tc>
                   <a:txBody>
                     <a:bodyPr/>
                     <a:lstStyle/>
                     <a:p>
+                      <a:pPr algn="ctr"/>
                       <a:r>
                         <a:rPr lang="en-US" sz="2600" b="0" dirty="0"/>
                         <a:t>Database Comparison</a:t>
                       </a:r>
                     </a:p>
                   </a:txBody>
-                  <a:tcPr/>
+                  <a:tcPr anchor="ctr">
+                    <a:solidFill>
+                      <a:srgbClr val="8B79EE"/>
+                    </a:solidFill>
+                  </a:tcPr>
                 </a:tc>
                 <a:extLst>
                   <a:ext uri="{0D108BD9-81ED-4DB2-BD59-A6C34878D82A}">
@@ -6219,20 +6426,29 @@
                       </a:r>
                     </a:p>
                   </a:txBody>
-                  <a:tcPr/>
+                  <a:tcPr>
+                    <a:solidFill>
+                      <a:srgbClr val="CDCDC1"/>
+                    </a:solidFill>
+                  </a:tcPr>
                 </a:tc>
                 <a:tc>
                   <a:txBody>
                     <a:bodyPr/>
                     <a:lstStyle/>
                     <a:p>
+                      <a:pPr algn="ctr"/>
                       <a:r>
                         <a:rPr lang="en-US" sz="2600" b="0" dirty="0"/>
                         <a:t>2</a:t>
                       </a:r>
                     </a:p>
                   </a:txBody>
-                  <a:tcPr/>
+                  <a:tcPr>
+                    <a:solidFill>
+                      <a:srgbClr val="CDCDC1"/>
+                    </a:solidFill>
+                  </a:tcPr>
                 </a:tc>
                 <a:tc>
                   <a:txBody>
@@ -6245,7 +6461,11 @@
                       </a:r>
                     </a:p>
                   </a:txBody>
-                  <a:tcPr/>
+                  <a:tcPr>
+                    <a:solidFill>
+                      <a:srgbClr val="CDCDC1"/>
+                    </a:solidFill>
+                  </a:tcPr>
                 </a:tc>
                 <a:tc>
                   <a:txBody>
@@ -6258,7 +6478,11 @@
                       </a:r>
                     </a:p>
                   </a:txBody>
-                  <a:tcPr/>
+                  <a:tcPr>
+                    <a:solidFill>
+                      <a:srgbClr val="CDCDC1"/>
+                    </a:solidFill>
+                  </a:tcPr>
                 </a:tc>
                 <a:extLst>
                   <a:ext uri="{0D108BD9-81ED-4DB2-BD59-A6C34878D82A}">
@@ -6278,20 +6502,29 @@
                       </a:r>
                     </a:p>
                   </a:txBody>
-                  <a:tcPr/>
+                  <a:tcPr>
+                    <a:solidFill>
+                      <a:srgbClr val="CDCDC1"/>
+                    </a:solidFill>
+                  </a:tcPr>
                 </a:tc>
                 <a:tc>
                   <a:txBody>
                     <a:bodyPr/>
                     <a:lstStyle/>
                     <a:p>
+                      <a:pPr algn="ctr"/>
                       <a:r>
                         <a:rPr lang="en-US" sz="2600" b="0" dirty="0"/>
                         <a:t>4</a:t>
                       </a:r>
                     </a:p>
                   </a:txBody>
-                  <a:tcPr/>
+                  <a:tcPr>
+                    <a:solidFill>
+                      <a:srgbClr val="CDCDC1"/>
+                    </a:solidFill>
+                  </a:tcPr>
                 </a:tc>
                 <a:tc>
                   <a:txBody>
@@ -6304,7 +6537,11 @@
                       </a:r>
                     </a:p>
                   </a:txBody>
-                  <a:tcPr/>
+                  <a:tcPr>
+                    <a:solidFill>
+                      <a:srgbClr val="CDCDC1"/>
+                    </a:solidFill>
+                  </a:tcPr>
                 </a:tc>
                 <a:tc>
                   <a:txBody>
@@ -6317,7 +6554,11 @@
                       </a:r>
                     </a:p>
                   </a:txBody>
-                  <a:tcPr/>
+                  <a:tcPr>
+                    <a:solidFill>
+                      <a:srgbClr val="CDCDC1"/>
+                    </a:solidFill>
+                  </a:tcPr>
                 </a:tc>
                 <a:extLst>
                   <a:ext uri="{0D108BD9-81ED-4DB2-BD59-A6C34878D82A}">
@@ -6337,20 +6578,29 @@
                       </a:r>
                     </a:p>
                   </a:txBody>
-                  <a:tcPr/>
+                  <a:tcPr>
+                    <a:solidFill>
+                      <a:srgbClr val="CDCDC1"/>
+                    </a:solidFill>
+                  </a:tcPr>
                 </a:tc>
                 <a:tc>
                   <a:txBody>
                     <a:bodyPr/>
                     <a:lstStyle/>
                     <a:p>
+                      <a:pPr algn="ctr"/>
                       <a:r>
                         <a:rPr lang="en-US" sz="2600" b="0" dirty="0"/>
                         <a:t>2</a:t>
                       </a:r>
                     </a:p>
                   </a:txBody>
-                  <a:tcPr/>
+                  <a:tcPr>
+                    <a:solidFill>
+                      <a:srgbClr val="CDCDC1"/>
+                    </a:solidFill>
+                  </a:tcPr>
                 </a:tc>
                 <a:tc>
                   <a:txBody>
@@ -6363,7 +6613,11 @@
                       </a:r>
                     </a:p>
                   </a:txBody>
-                  <a:tcPr/>
+                  <a:tcPr>
+                    <a:solidFill>
+                      <a:srgbClr val="CDCDC1"/>
+                    </a:solidFill>
+                  </a:tcPr>
                 </a:tc>
                 <a:tc>
                   <a:txBody>
@@ -6376,7 +6630,11 @@
                       </a:r>
                     </a:p>
                   </a:txBody>
-                  <a:tcPr/>
+                  <a:tcPr>
+                    <a:solidFill>
+                      <a:srgbClr val="CDCDC1"/>
+                    </a:solidFill>
+                  </a:tcPr>
                 </a:tc>
                 <a:extLst>
                   <a:ext uri="{0D108BD9-81ED-4DB2-BD59-A6C34878D82A}">
@@ -6402,8 +6660,8 @@
         </p:nvSpPr>
         <p:spPr>
           <a:xfrm>
-            <a:off x="4736689" y="24878777"/>
-            <a:ext cx="9022918" cy="830997"/>
+            <a:off x="13659597" y="33622637"/>
+            <a:ext cx="15292691" cy="830997"/>
           </a:xfrm>
           <a:prstGeom prst="rect">
             <a:avLst/>
